--- a/기획서/레벨디자인.pptx
+++ b/기획서/레벨디자인.pptx
@@ -4,6 +4,9 @@
   <p:sldMasterIdLst>
     <p:sldMasterId id="2147483648" r:id="rId1"/>
   </p:sldMasterIdLst>
+  <p:notesMasterIdLst>
+    <p:notesMasterId r:id="rId3"/>
+  </p:notesMasterIdLst>
   <p:sldIdLst>
     <p:sldId id="256" r:id="rId2"/>
   </p:sldIdLst>
@@ -105,6 +108,439 @@
     </a:lvl9pPr>
   </p:defaultTextStyle>
 </p:presentation>
+</file>
+
+<file path=ppt/notesMasters/notesMaster1.xml><?xml version="1.0" encoding="utf-8"?>
+<p:notesMaster xmlns:a="http://schemas.openxmlformats.org/drawingml/2006/main" xmlns:r="http://schemas.openxmlformats.org/officeDocument/2006/relationships" xmlns:p="http://schemas.openxmlformats.org/presentationml/2006/main">
+  <p:cSld>
+    <p:bg>
+      <p:bgRef idx="1001">
+        <a:schemeClr val="bg1"/>
+      </p:bgRef>
+    </p:bg>
+    <p:spTree>
+      <p:nvGrpSpPr>
+        <p:cNvPr id="1" name=""/>
+        <p:cNvGrpSpPr/>
+        <p:nvPr/>
+      </p:nvGrpSpPr>
+      <p:grpSpPr>
+        <a:xfrm>
+          <a:off x="0" y="0"/>
+          <a:ext cx="0" cy="0"/>
+          <a:chOff x="0" y="0"/>
+          <a:chExt cx="0" cy="0"/>
+        </a:xfrm>
+      </p:grpSpPr>
+      <p:sp>
+        <p:nvSpPr>
+          <p:cNvPr id="2" name="머리글 개체 틀 1"/>
+          <p:cNvSpPr>
+            <a:spLocks noGrp="1"/>
+          </p:cNvSpPr>
+          <p:nvPr>
+            <p:ph type="hdr" sz="quarter"/>
+          </p:nvPr>
+        </p:nvSpPr>
+        <p:spPr>
+          <a:xfrm>
+            <a:off x="0" y="0"/>
+            <a:ext cx="2971800" cy="458788"/>
+          </a:xfrm>
+          <a:prstGeom prst="rect">
+            <a:avLst/>
+          </a:prstGeom>
+        </p:spPr>
+        <p:txBody>
+          <a:bodyPr vert="horz" lIns="91440" tIns="45720" rIns="91440" bIns="45720" rtlCol="0"/>
+          <a:lstStyle>
+            <a:lvl1pPr algn="l">
+              <a:defRPr sz="1200"/>
+            </a:lvl1pPr>
+          </a:lstStyle>
+          <a:p>
+            <a:endParaRPr lang="ko-KR" altLang="en-US"/>
+          </a:p>
+        </p:txBody>
+      </p:sp>
+      <p:sp>
+        <p:nvSpPr>
+          <p:cNvPr id="3" name="날짜 개체 틀 2"/>
+          <p:cNvSpPr>
+            <a:spLocks noGrp="1"/>
+          </p:cNvSpPr>
+          <p:nvPr>
+            <p:ph type="dt" idx="1"/>
+          </p:nvPr>
+        </p:nvSpPr>
+        <p:spPr>
+          <a:xfrm>
+            <a:off x="3884613" y="0"/>
+            <a:ext cx="2971800" cy="458788"/>
+          </a:xfrm>
+          <a:prstGeom prst="rect">
+            <a:avLst/>
+          </a:prstGeom>
+        </p:spPr>
+        <p:txBody>
+          <a:bodyPr vert="horz" lIns="91440" tIns="45720" rIns="91440" bIns="45720" rtlCol="0"/>
+          <a:lstStyle>
+            <a:lvl1pPr algn="r">
+              <a:defRPr sz="1200"/>
+            </a:lvl1pPr>
+          </a:lstStyle>
+          <a:p>
+            <a:fld id="{0E11D9DC-3FEE-4F11-AD35-CEE651F1B297}" type="datetimeFigureOut">
+              <a:rPr lang="ko-KR" altLang="en-US" smtClean="0"/>
+              <a:t>2025-01-06</a:t>
+            </a:fld>
+            <a:endParaRPr lang="ko-KR" altLang="en-US"/>
+          </a:p>
+        </p:txBody>
+      </p:sp>
+      <p:sp>
+        <p:nvSpPr>
+          <p:cNvPr id="4" name="슬라이드 이미지 개체 틀 3"/>
+          <p:cNvSpPr>
+            <a:spLocks noGrp="1" noRot="1" noChangeAspect="1"/>
+          </p:cNvSpPr>
+          <p:nvPr>
+            <p:ph type="sldImg" idx="2"/>
+          </p:nvPr>
+        </p:nvSpPr>
+        <p:spPr>
+          <a:xfrm>
+            <a:off x="685800" y="1143000"/>
+            <a:ext cx="5486400" cy="3086100"/>
+          </a:xfrm>
+          <a:prstGeom prst="rect">
+            <a:avLst/>
+          </a:prstGeom>
+          <a:noFill/>
+          <a:ln w="12700">
+            <a:solidFill>
+              <a:prstClr val="black"/>
+            </a:solidFill>
+          </a:ln>
+        </p:spPr>
+        <p:txBody>
+          <a:bodyPr vert="horz" lIns="91440" tIns="45720" rIns="91440" bIns="45720" rtlCol="0" anchor="ctr"/>
+          <a:lstStyle/>
+          <a:p>
+            <a:endParaRPr lang="ko-KR" altLang="en-US"/>
+          </a:p>
+        </p:txBody>
+      </p:sp>
+      <p:sp>
+        <p:nvSpPr>
+          <p:cNvPr id="5" name="슬라이드 노트 개체 틀 4"/>
+          <p:cNvSpPr>
+            <a:spLocks noGrp="1"/>
+          </p:cNvSpPr>
+          <p:nvPr>
+            <p:ph type="body" sz="quarter" idx="3"/>
+          </p:nvPr>
+        </p:nvSpPr>
+        <p:spPr>
+          <a:xfrm>
+            <a:off x="685800" y="4400550"/>
+            <a:ext cx="5486400" cy="3600450"/>
+          </a:xfrm>
+          <a:prstGeom prst="rect">
+            <a:avLst/>
+          </a:prstGeom>
+        </p:spPr>
+        <p:txBody>
+          <a:bodyPr vert="horz" lIns="91440" tIns="45720" rIns="91440" bIns="45720" rtlCol="0"/>
+          <a:lstStyle/>
+          <a:p>
+            <a:pPr lvl="0"/>
+            <a:r>
+              <a:rPr lang="ko-KR" altLang="en-US"/>
+              <a:t>마스터 텍스트 스타일을 편집하려면 클릭</a:t>
+            </a:r>
+          </a:p>
+          <a:p>
+            <a:pPr lvl="1"/>
+            <a:r>
+              <a:rPr lang="ko-KR" altLang="en-US"/>
+              <a:t>두 번째 수준</a:t>
+            </a:r>
+          </a:p>
+          <a:p>
+            <a:pPr lvl="2"/>
+            <a:r>
+              <a:rPr lang="ko-KR" altLang="en-US"/>
+              <a:t>세 번째 수준</a:t>
+            </a:r>
+          </a:p>
+          <a:p>
+            <a:pPr lvl="3"/>
+            <a:r>
+              <a:rPr lang="ko-KR" altLang="en-US"/>
+              <a:t>네 번째 수준</a:t>
+            </a:r>
+          </a:p>
+          <a:p>
+            <a:pPr lvl="4"/>
+            <a:r>
+              <a:rPr lang="ko-KR" altLang="en-US"/>
+              <a:t>다섯 번째 수준</a:t>
+            </a:r>
+          </a:p>
+        </p:txBody>
+      </p:sp>
+      <p:sp>
+        <p:nvSpPr>
+          <p:cNvPr id="6" name="바닥글 개체 틀 5"/>
+          <p:cNvSpPr>
+            <a:spLocks noGrp="1"/>
+          </p:cNvSpPr>
+          <p:nvPr>
+            <p:ph type="ftr" sz="quarter" idx="4"/>
+          </p:nvPr>
+        </p:nvSpPr>
+        <p:spPr>
+          <a:xfrm>
+            <a:off x="0" y="8685213"/>
+            <a:ext cx="2971800" cy="458787"/>
+          </a:xfrm>
+          <a:prstGeom prst="rect">
+            <a:avLst/>
+          </a:prstGeom>
+        </p:spPr>
+        <p:txBody>
+          <a:bodyPr vert="horz" lIns="91440" tIns="45720" rIns="91440" bIns="45720" rtlCol="0" anchor="b"/>
+          <a:lstStyle>
+            <a:lvl1pPr algn="l">
+              <a:defRPr sz="1200"/>
+            </a:lvl1pPr>
+          </a:lstStyle>
+          <a:p>
+            <a:endParaRPr lang="ko-KR" altLang="en-US"/>
+          </a:p>
+        </p:txBody>
+      </p:sp>
+      <p:sp>
+        <p:nvSpPr>
+          <p:cNvPr id="7" name="슬라이드 번호 개체 틀 6"/>
+          <p:cNvSpPr>
+            <a:spLocks noGrp="1"/>
+          </p:cNvSpPr>
+          <p:nvPr>
+            <p:ph type="sldNum" sz="quarter" idx="5"/>
+          </p:nvPr>
+        </p:nvSpPr>
+        <p:spPr>
+          <a:xfrm>
+            <a:off x="3884613" y="8685213"/>
+            <a:ext cx="2971800" cy="458787"/>
+          </a:xfrm>
+          <a:prstGeom prst="rect">
+            <a:avLst/>
+          </a:prstGeom>
+        </p:spPr>
+        <p:txBody>
+          <a:bodyPr vert="horz" lIns="91440" tIns="45720" rIns="91440" bIns="45720" rtlCol="0" anchor="b"/>
+          <a:lstStyle>
+            <a:lvl1pPr algn="r">
+              <a:defRPr sz="1200"/>
+            </a:lvl1pPr>
+          </a:lstStyle>
+          <a:p>
+            <a:fld id="{F714CBA9-0158-404A-81E2-D960BBF1450D}" type="slidenum">
+              <a:rPr lang="ko-KR" altLang="en-US" smtClean="0"/>
+              <a:t>‹#›</a:t>
+            </a:fld>
+            <a:endParaRPr lang="ko-KR" altLang="en-US"/>
+          </a:p>
+        </p:txBody>
+      </p:sp>
+    </p:spTree>
+    <p:extLst>
+      <p:ext uri="{BB962C8B-B14F-4D97-AF65-F5344CB8AC3E}">
+        <p14:creationId xmlns:p14="http://schemas.microsoft.com/office/powerpoint/2010/main" val="2834023791"/>
+      </p:ext>
+    </p:extLst>
+  </p:cSld>
+  <p:clrMap bg1="lt1" tx1="dk1" bg2="lt2" tx2="dk2" accent1="accent1" accent2="accent2" accent3="accent3" accent4="accent4" accent5="accent5" accent6="accent6" hlink="hlink" folHlink="folHlink"/>
+  <p:notesStyle>
+    <a:lvl1pPr marL="0" algn="l" defTabSz="914400" rtl="0" eaLnBrk="1" latinLnBrk="1" hangingPunct="1">
+      <a:defRPr sz="1200" kern="1200">
+        <a:solidFill>
+          <a:schemeClr val="tx1"/>
+        </a:solidFill>
+        <a:latin typeface="+mn-lt"/>
+        <a:ea typeface="+mn-ea"/>
+        <a:cs typeface="+mn-cs"/>
+      </a:defRPr>
+    </a:lvl1pPr>
+    <a:lvl2pPr marL="457200" algn="l" defTabSz="914400" rtl="0" eaLnBrk="1" latinLnBrk="1" hangingPunct="1">
+      <a:defRPr sz="1200" kern="1200">
+        <a:solidFill>
+          <a:schemeClr val="tx1"/>
+        </a:solidFill>
+        <a:latin typeface="+mn-lt"/>
+        <a:ea typeface="+mn-ea"/>
+        <a:cs typeface="+mn-cs"/>
+      </a:defRPr>
+    </a:lvl2pPr>
+    <a:lvl3pPr marL="914400" algn="l" defTabSz="914400" rtl="0" eaLnBrk="1" latinLnBrk="1" hangingPunct="1">
+      <a:defRPr sz="1200" kern="1200">
+        <a:solidFill>
+          <a:schemeClr val="tx1"/>
+        </a:solidFill>
+        <a:latin typeface="+mn-lt"/>
+        <a:ea typeface="+mn-ea"/>
+        <a:cs typeface="+mn-cs"/>
+      </a:defRPr>
+    </a:lvl3pPr>
+    <a:lvl4pPr marL="1371600" algn="l" defTabSz="914400" rtl="0" eaLnBrk="1" latinLnBrk="1" hangingPunct="1">
+      <a:defRPr sz="1200" kern="1200">
+        <a:solidFill>
+          <a:schemeClr val="tx1"/>
+        </a:solidFill>
+        <a:latin typeface="+mn-lt"/>
+        <a:ea typeface="+mn-ea"/>
+        <a:cs typeface="+mn-cs"/>
+      </a:defRPr>
+    </a:lvl4pPr>
+    <a:lvl5pPr marL="1828800" algn="l" defTabSz="914400" rtl="0" eaLnBrk="1" latinLnBrk="1" hangingPunct="1">
+      <a:defRPr sz="1200" kern="1200">
+        <a:solidFill>
+          <a:schemeClr val="tx1"/>
+        </a:solidFill>
+        <a:latin typeface="+mn-lt"/>
+        <a:ea typeface="+mn-ea"/>
+        <a:cs typeface="+mn-cs"/>
+      </a:defRPr>
+    </a:lvl5pPr>
+    <a:lvl6pPr marL="2286000" algn="l" defTabSz="914400" rtl="0" eaLnBrk="1" latinLnBrk="1" hangingPunct="1">
+      <a:defRPr sz="1200" kern="1200">
+        <a:solidFill>
+          <a:schemeClr val="tx1"/>
+        </a:solidFill>
+        <a:latin typeface="+mn-lt"/>
+        <a:ea typeface="+mn-ea"/>
+        <a:cs typeface="+mn-cs"/>
+      </a:defRPr>
+    </a:lvl6pPr>
+    <a:lvl7pPr marL="2743200" algn="l" defTabSz="914400" rtl="0" eaLnBrk="1" latinLnBrk="1" hangingPunct="1">
+      <a:defRPr sz="1200" kern="1200">
+        <a:solidFill>
+          <a:schemeClr val="tx1"/>
+        </a:solidFill>
+        <a:latin typeface="+mn-lt"/>
+        <a:ea typeface="+mn-ea"/>
+        <a:cs typeface="+mn-cs"/>
+      </a:defRPr>
+    </a:lvl7pPr>
+    <a:lvl8pPr marL="3200400" algn="l" defTabSz="914400" rtl="0" eaLnBrk="1" latinLnBrk="1" hangingPunct="1">
+      <a:defRPr sz="1200" kern="1200">
+        <a:solidFill>
+          <a:schemeClr val="tx1"/>
+        </a:solidFill>
+        <a:latin typeface="+mn-lt"/>
+        <a:ea typeface="+mn-ea"/>
+        <a:cs typeface="+mn-cs"/>
+      </a:defRPr>
+    </a:lvl8pPr>
+    <a:lvl9pPr marL="3657600" algn="l" defTabSz="914400" rtl="0" eaLnBrk="1" latinLnBrk="1" hangingPunct="1">
+      <a:defRPr sz="1200" kern="1200">
+        <a:solidFill>
+          <a:schemeClr val="tx1"/>
+        </a:solidFill>
+        <a:latin typeface="+mn-lt"/>
+        <a:ea typeface="+mn-ea"/>
+        <a:cs typeface="+mn-cs"/>
+      </a:defRPr>
+    </a:lvl9pPr>
+  </p:notesStyle>
+</p:notesMaster>
+</file>
+
+<file path=ppt/notesSlides/notesSlide1.xml><?xml version="1.0" encoding="utf-8"?>
+<p:notes xmlns:a="http://schemas.openxmlformats.org/drawingml/2006/main" xmlns:r="http://schemas.openxmlformats.org/officeDocument/2006/relationships" xmlns:p="http://schemas.openxmlformats.org/presentationml/2006/main">
+  <p:cSld>
+    <p:spTree>
+      <p:nvGrpSpPr>
+        <p:cNvPr id="1" name=""/>
+        <p:cNvGrpSpPr/>
+        <p:nvPr/>
+      </p:nvGrpSpPr>
+      <p:grpSpPr>
+        <a:xfrm>
+          <a:off x="0" y="0"/>
+          <a:ext cx="0" cy="0"/>
+          <a:chOff x="0" y="0"/>
+          <a:chExt cx="0" cy="0"/>
+        </a:xfrm>
+      </p:grpSpPr>
+      <p:sp>
+        <p:nvSpPr>
+          <p:cNvPr id="2" name="슬라이드 이미지 개체 틀 1"/>
+          <p:cNvSpPr>
+            <a:spLocks noGrp="1" noRot="1" noChangeAspect="1"/>
+          </p:cNvSpPr>
+          <p:nvPr>
+            <p:ph type="sldImg"/>
+          </p:nvPr>
+        </p:nvSpPr>
+        <p:spPr/>
+      </p:sp>
+      <p:sp>
+        <p:nvSpPr>
+          <p:cNvPr id="3" name="슬라이드 노트 개체 틀 2"/>
+          <p:cNvSpPr>
+            <a:spLocks noGrp="1"/>
+          </p:cNvSpPr>
+          <p:nvPr>
+            <p:ph type="body" idx="1"/>
+          </p:nvPr>
+        </p:nvSpPr>
+        <p:spPr/>
+        <p:txBody>
+          <a:bodyPr/>
+          <a:lstStyle/>
+          <a:p>
+            <a:endParaRPr lang="ko-KR" altLang="en-US" dirty="0"/>
+          </a:p>
+        </p:txBody>
+      </p:sp>
+      <p:sp>
+        <p:nvSpPr>
+          <p:cNvPr id="4" name="슬라이드 번호 개체 틀 3"/>
+          <p:cNvSpPr>
+            <a:spLocks noGrp="1"/>
+          </p:cNvSpPr>
+          <p:nvPr>
+            <p:ph type="sldNum" sz="quarter" idx="5"/>
+          </p:nvPr>
+        </p:nvSpPr>
+        <p:spPr/>
+        <p:txBody>
+          <a:bodyPr/>
+          <a:lstStyle/>
+          <a:p>
+            <a:fld id="{F714CBA9-0158-404A-81E2-D960BBF1450D}" type="slidenum">
+              <a:rPr lang="ko-KR" altLang="en-US" smtClean="0"/>
+              <a:t>1</a:t>
+            </a:fld>
+            <a:endParaRPr lang="ko-KR" altLang="en-US"/>
+          </a:p>
+        </p:txBody>
+      </p:sp>
+    </p:spTree>
+    <p:extLst>
+      <p:ext uri="{BB962C8B-B14F-4D97-AF65-F5344CB8AC3E}">
+        <p14:creationId xmlns:p14="http://schemas.microsoft.com/office/powerpoint/2010/main" val="4159657352"/>
+      </p:ext>
+    </p:extLst>
+  </p:cSld>
+  <p:clrMapOvr>
+    <a:masterClrMapping/>
+  </p:clrMapOvr>
+</p:notes>
 </file>
 
 <file path=ppt/slideLayouts/slideLayout1.xml><?xml version="1.0" encoding="utf-8"?>
@@ -4276,7 +4712,7 @@
         <p:spPr>
           <a:xfrm>
             <a:off x="12917714" y="-1426213"/>
-            <a:ext cx="1320799" cy="5198113"/>
+            <a:ext cx="1320799" cy="5045713"/>
           </a:xfrm>
           <a:prstGeom prst="rect">
             <a:avLst/>
@@ -4683,9 +5119,14 @@
           <a:prstGeom prst="rtTriangle">
             <a:avLst/>
           </a:prstGeom>
-          <a:solidFill>
-            <a:schemeClr val="bg2"/>
-          </a:solidFill>
+          <a:pattFill prst="wdDnDiag">
+            <a:fgClr>
+              <a:srgbClr val="92D050"/>
+            </a:fgClr>
+            <a:bgClr>
+              <a:schemeClr val="bg2"/>
+            </a:bgClr>
+          </a:pattFill>
         </p:spPr>
         <p:style>
           <a:lnRef idx="2">
@@ -5334,6 +5775,1499 @@
           <a:p>
             <a:pPr algn="ctr"/>
             <a:endParaRPr lang="ko-KR" altLang="en-US"/>
+          </a:p>
+        </p:txBody>
+      </p:sp>
+      <p:sp>
+        <p:nvSpPr>
+          <p:cNvPr id="56" name="평행 사변형 55">
+            <a:extLst>
+              <a:ext uri="{FF2B5EF4-FFF2-40B4-BE49-F238E27FC236}">
+                <a16:creationId xmlns:a16="http://schemas.microsoft.com/office/drawing/2014/main" id="{6F4DDD19-BA71-E9D0-CCDA-E3DBB299F845}"/>
+              </a:ext>
+            </a:extLst>
+          </p:cNvPr>
+          <p:cNvSpPr/>
+          <p:nvPr/>
+        </p:nvSpPr>
+        <p:spPr>
+          <a:xfrm>
+            <a:off x="15013858" y="-7462684"/>
+            <a:ext cx="9671984" cy="778189"/>
+          </a:xfrm>
+          <a:prstGeom prst="parallelogram">
+            <a:avLst>
+              <a:gd name="adj" fmla="val 110376"/>
+            </a:avLst>
+          </a:prstGeom>
+          <a:solidFill>
+            <a:schemeClr val="bg2"/>
+          </a:solidFill>
+        </p:spPr>
+        <p:style>
+          <a:lnRef idx="2">
+            <a:schemeClr val="accent1">
+              <a:shade val="15000"/>
+            </a:schemeClr>
+          </a:lnRef>
+          <a:fillRef idx="1">
+            <a:schemeClr val="accent1"/>
+          </a:fillRef>
+          <a:effectRef idx="0">
+            <a:schemeClr val="accent1"/>
+          </a:effectRef>
+          <a:fontRef idx="minor">
+            <a:schemeClr val="lt1"/>
+          </a:fontRef>
+        </p:style>
+        <p:txBody>
+          <a:bodyPr rtlCol="0" anchor="ctr"/>
+          <a:lstStyle/>
+          <a:p>
+            <a:pPr algn="ctr"/>
+            <a:endParaRPr lang="ko-KR" altLang="en-US"/>
+          </a:p>
+        </p:txBody>
+      </p:sp>
+      <p:sp>
+        <p:nvSpPr>
+          <p:cNvPr id="57" name="다이아몬드 56">
+            <a:extLst>
+              <a:ext uri="{FF2B5EF4-FFF2-40B4-BE49-F238E27FC236}">
+                <a16:creationId xmlns:a16="http://schemas.microsoft.com/office/drawing/2014/main" id="{C2854F49-C5BC-506B-677F-8A40D7A414F2}"/>
+              </a:ext>
+            </a:extLst>
+          </p:cNvPr>
+          <p:cNvSpPr/>
+          <p:nvPr/>
+        </p:nvSpPr>
+        <p:spPr>
+          <a:xfrm rot="359639">
+            <a:off x="14304326" y="-8352056"/>
+            <a:ext cx="1549411" cy="1669814"/>
+          </a:xfrm>
+          <a:prstGeom prst="diamond">
+            <a:avLst/>
+          </a:prstGeom>
+          <a:solidFill>
+            <a:schemeClr val="bg2"/>
+          </a:solidFill>
+        </p:spPr>
+        <p:style>
+          <a:lnRef idx="2">
+            <a:schemeClr val="accent1">
+              <a:shade val="15000"/>
+            </a:schemeClr>
+          </a:lnRef>
+          <a:fillRef idx="1">
+            <a:schemeClr val="accent1"/>
+          </a:fillRef>
+          <a:effectRef idx="0">
+            <a:schemeClr val="accent1"/>
+          </a:effectRef>
+          <a:fontRef idx="minor">
+            <a:schemeClr val="lt1"/>
+          </a:fontRef>
+        </p:style>
+        <p:txBody>
+          <a:bodyPr rtlCol="0" anchor="ctr"/>
+          <a:lstStyle/>
+          <a:p>
+            <a:pPr algn="ctr"/>
+            <a:endParaRPr lang="ko-KR" altLang="en-US"/>
+          </a:p>
+        </p:txBody>
+      </p:sp>
+      <p:sp>
+        <p:nvSpPr>
+          <p:cNvPr id="59" name="평행 사변형 58">
+            <a:extLst>
+              <a:ext uri="{FF2B5EF4-FFF2-40B4-BE49-F238E27FC236}">
+                <a16:creationId xmlns:a16="http://schemas.microsoft.com/office/drawing/2014/main" id="{E81598D8-815A-8C19-1158-2E3A10233685}"/>
+              </a:ext>
+            </a:extLst>
+          </p:cNvPr>
+          <p:cNvSpPr/>
+          <p:nvPr/>
+        </p:nvSpPr>
+        <p:spPr>
+          <a:xfrm>
+            <a:off x="9412604" y="-8364786"/>
+            <a:ext cx="5722374" cy="1220800"/>
+          </a:xfrm>
+          <a:prstGeom prst="parallelogram">
+            <a:avLst>
+              <a:gd name="adj" fmla="val 110134"/>
+            </a:avLst>
+          </a:prstGeom>
+          <a:solidFill>
+            <a:schemeClr val="accent4"/>
+          </a:solidFill>
+        </p:spPr>
+        <p:style>
+          <a:lnRef idx="2">
+            <a:schemeClr val="accent1">
+              <a:shade val="15000"/>
+            </a:schemeClr>
+          </a:lnRef>
+          <a:fillRef idx="1">
+            <a:schemeClr val="accent1"/>
+          </a:fillRef>
+          <a:effectRef idx="0">
+            <a:schemeClr val="accent1"/>
+          </a:effectRef>
+          <a:fontRef idx="minor">
+            <a:schemeClr val="lt1"/>
+          </a:fontRef>
+        </p:style>
+        <p:txBody>
+          <a:bodyPr rtlCol="0" anchor="ctr"/>
+          <a:lstStyle/>
+          <a:p>
+            <a:pPr algn="ctr"/>
+            <a:endParaRPr lang="ko-KR" altLang="en-US"/>
+          </a:p>
+        </p:txBody>
+      </p:sp>
+      <p:sp>
+        <p:nvSpPr>
+          <p:cNvPr id="60" name="직사각형 59">
+            <a:extLst>
+              <a:ext uri="{FF2B5EF4-FFF2-40B4-BE49-F238E27FC236}">
+                <a16:creationId xmlns:a16="http://schemas.microsoft.com/office/drawing/2014/main" id="{26FB4003-E5DA-DC1E-788B-E897DC589DE6}"/>
+              </a:ext>
+            </a:extLst>
+          </p:cNvPr>
+          <p:cNvSpPr/>
+          <p:nvPr/>
+        </p:nvSpPr>
+        <p:spPr>
+          <a:xfrm>
+            <a:off x="26996568" y="2360420"/>
+            <a:ext cx="2987001" cy="839980"/>
+          </a:xfrm>
+          <a:prstGeom prst="rect">
+            <a:avLst/>
+          </a:prstGeom>
+          <a:solidFill>
+            <a:schemeClr val="tx2"/>
+          </a:solidFill>
+        </p:spPr>
+        <p:style>
+          <a:lnRef idx="2">
+            <a:schemeClr val="accent1">
+              <a:shade val="15000"/>
+            </a:schemeClr>
+          </a:lnRef>
+          <a:fillRef idx="1">
+            <a:schemeClr val="accent1"/>
+          </a:fillRef>
+          <a:effectRef idx="0">
+            <a:schemeClr val="accent1"/>
+          </a:effectRef>
+          <a:fontRef idx="minor">
+            <a:schemeClr val="lt1"/>
+          </a:fontRef>
+        </p:style>
+        <p:txBody>
+          <a:bodyPr rtlCol="0" anchor="ctr"/>
+          <a:lstStyle/>
+          <a:p>
+            <a:pPr algn="ctr"/>
+            <a:endParaRPr lang="ko-KR" altLang="en-US"/>
+          </a:p>
+        </p:txBody>
+      </p:sp>
+      <p:cxnSp>
+        <p:nvCxnSpPr>
+          <p:cNvPr id="61" name="직선 연결선 60">
+            <a:extLst>
+              <a:ext uri="{FF2B5EF4-FFF2-40B4-BE49-F238E27FC236}">
+                <a16:creationId xmlns:a16="http://schemas.microsoft.com/office/drawing/2014/main" id="{C75F6AD0-C9B1-E35B-ED81-4E1A1DB3D247}"/>
+              </a:ext>
+            </a:extLst>
+          </p:cNvPr>
+          <p:cNvCxnSpPr>
+            <a:cxnSpLocks/>
+          </p:cNvCxnSpPr>
+          <p:nvPr/>
+        </p:nvCxnSpPr>
+        <p:spPr>
+          <a:xfrm flipV="1">
+            <a:off x="26891448" y="2006171"/>
+            <a:ext cx="7254" cy="1484919"/>
+          </a:xfrm>
+          <a:prstGeom prst="line">
+            <a:avLst/>
+          </a:prstGeom>
+          <a:ln w="76200">
+            <a:solidFill>
+              <a:srgbClr val="FF0000"/>
+            </a:solidFill>
+          </a:ln>
+        </p:spPr>
+        <p:style>
+          <a:lnRef idx="2">
+            <a:schemeClr val="accent1"/>
+          </a:lnRef>
+          <a:fillRef idx="0">
+            <a:schemeClr val="accent1"/>
+          </a:fillRef>
+          <a:effectRef idx="1">
+            <a:schemeClr val="accent1"/>
+          </a:effectRef>
+          <a:fontRef idx="minor">
+            <a:schemeClr val="tx1"/>
+          </a:fontRef>
+        </p:style>
+      </p:cxnSp>
+      <p:cxnSp>
+        <p:nvCxnSpPr>
+          <p:cNvPr id="62" name="직선 화살표 연결선 61">
+            <a:extLst>
+              <a:ext uri="{FF2B5EF4-FFF2-40B4-BE49-F238E27FC236}">
+                <a16:creationId xmlns:a16="http://schemas.microsoft.com/office/drawing/2014/main" id="{0C4EFDA8-43A3-C57B-BA78-DF90F45D5AD5}"/>
+              </a:ext>
+            </a:extLst>
+          </p:cNvPr>
+          <p:cNvCxnSpPr>
+            <a:cxnSpLocks/>
+          </p:cNvCxnSpPr>
+          <p:nvPr/>
+        </p:nvCxnSpPr>
+        <p:spPr>
+          <a:xfrm>
+            <a:off x="26553432" y="2704959"/>
+            <a:ext cx="975736" cy="0"/>
+          </a:xfrm>
+          <a:prstGeom prst="straightConnector1">
+            <a:avLst/>
+          </a:prstGeom>
+          <a:ln w="76200">
+            <a:solidFill>
+              <a:srgbClr val="FF0000"/>
+            </a:solidFill>
+            <a:tailEnd type="triangle"/>
+          </a:ln>
+        </p:spPr>
+        <p:style>
+          <a:lnRef idx="2">
+            <a:schemeClr val="accent1"/>
+          </a:lnRef>
+          <a:fillRef idx="0">
+            <a:schemeClr val="accent1"/>
+          </a:fillRef>
+          <a:effectRef idx="1">
+            <a:schemeClr val="accent1"/>
+          </a:effectRef>
+          <a:fontRef idx="minor">
+            <a:schemeClr val="tx1"/>
+          </a:fontRef>
+        </p:style>
+      </p:cxnSp>
+      <p:sp>
+        <p:nvSpPr>
+          <p:cNvPr id="63" name="TextBox 62">
+            <a:extLst>
+              <a:ext uri="{FF2B5EF4-FFF2-40B4-BE49-F238E27FC236}">
+                <a16:creationId xmlns:a16="http://schemas.microsoft.com/office/drawing/2014/main" id="{242FC488-3547-3275-0F82-431F9C61BB9F}"/>
+              </a:ext>
+            </a:extLst>
+          </p:cNvPr>
+          <p:cNvSpPr txBox="1"/>
+          <p:nvPr/>
+        </p:nvSpPr>
+        <p:spPr>
+          <a:xfrm>
+            <a:off x="26573737" y="2173802"/>
+            <a:ext cx="1280635" cy="1107996"/>
+          </a:xfrm>
+          <a:prstGeom prst="rect">
+            <a:avLst/>
+          </a:prstGeom>
+          <a:noFill/>
+        </p:spPr>
+        <p:txBody>
+          <a:bodyPr wrap="square" rtlCol="0">
+            <a:spAutoFit/>
+          </a:bodyPr>
+          <a:lstStyle/>
+          <a:p>
+            <a:r>
+              <a:rPr lang="en-US" altLang="ko-KR" sz="6600" b="1" dirty="0">
+                <a:solidFill>
+                  <a:srgbClr val="FF0000"/>
+                </a:solidFill>
+                <a:latin typeface="Aptos" panose="020B0004020202020204" pitchFamily="34" charset="0"/>
+                <a:ea typeface="ADLaM Display" panose="020F0502020204030204" pitchFamily="2" charset="0"/>
+                <a:cs typeface="Arial" panose="020B0604020202020204" pitchFamily="34" charset="0"/>
+              </a:rPr>
+              <a:t>X</a:t>
+            </a:r>
+            <a:endParaRPr lang="ko-KR" altLang="en-US" b="1" dirty="0">
+              <a:solidFill>
+                <a:srgbClr val="FF0000"/>
+              </a:solidFill>
+              <a:latin typeface="Aptos" panose="020B0004020202020204" pitchFamily="34" charset="0"/>
+              <a:cs typeface="Arial" panose="020B0604020202020204" pitchFamily="34" charset="0"/>
+            </a:endParaRPr>
+          </a:p>
+        </p:txBody>
+      </p:sp>
+      <p:sp>
+        <p:nvSpPr>
+          <p:cNvPr id="64" name="사다리꼴 63">
+            <a:extLst>
+              <a:ext uri="{FF2B5EF4-FFF2-40B4-BE49-F238E27FC236}">
+                <a16:creationId xmlns:a16="http://schemas.microsoft.com/office/drawing/2014/main" id="{7DAC3B91-D06F-62EC-11CC-1A4F944DE627}"/>
+              </a:ext>
+            </a:extLst>
+          </p:cNvPr>
+          <p:cNvSpPr/>
+          <p:nvPr/>
+        </p:nvSpPr>
+        <p:spPr>
+          <a:xfrm rot="16200000" flipH="1">
+            <a:off x="30025996" y="762682"/>
+            <a:ext cx="3950607" cy="4035458"/>
+          </a:xfrm>
+          <a:prstGeom prst="trapezoid">
+            <a:avLst>
+              <a:gd name="adj" fmla="val 39972"/>
+            </a:avLst>
+          </a:prstGeom>
+        </p:spPr>
+        <p:style>
+          <a:lnRef idx="2">
+            <a:schemeClr val="accent4">
+              <a:shade val="15000"/>
+            </a:schemeClr>
+          </a:lnRef>
+          <a:fillRef idx="1">
+            <a:schemeClr val="accent4"/>
+          </a:fillRef>
+          <a:effectRef idx="0">
+            <a:schemeClr val="accent4"/>
+          </a:effectRef>
+          <a:fontRef idx="minor">
+            <a:schemeClr val="lt1"/>
+          </a:fontRef>
+        </p:style>
+        <p:txBody>
+          <a:bodyPr rtlCol="0" anchor="ctr"/>
+          <a:lstStyle/>
+          <a:p>
+            <a:pPr algn="ctr"/>
+            <a:endParaRPr lang="ko-KR" altLang="en-US"/>
+          </a:p>
+        </p:txBody>
+      </p:sp>
+      <p:sp>
+        <p:nvSpPr>
+          <p:cNvPr id="65" name="사다리꼴 64">
+            <a:extLst>
+              <a:ext uri="{FF2B5EF4-FFF2-40B4-BE49-F238E27FC236}">
+                <a16:creationId xmlns:a16="http://schemas.microsoft.com/office/drawing/2014/main" id="{8A380F5A-4C20-25F7-BD5D-903EDA6C2585}"/>
+              </a:ext>
+            </a:extLst>
+          </p:cNvPr>
+          <p:cNvSpPr/>
+          <p:nvPr/>
+        </p:nvSpPr>
+        <p:spPr>
+          <a:xfrm>
+            <a:off x="24685842" y="-9497961"/>
+            <a:ext cx="1431708" cy="2035278"/>
+          </a:xfrm>
+          <a:prstGeom prst="trapezoid">
+            <a:avLst>
+              <a:gd name="adj" fmla="val 33241"/>
+            </a:avLst>
+          </a:prstGeom>
+          <a:pattFill prst="wdDnDiag">
+            <a:fgClr>
+              <a:srgbClr val="92D050"/>
+            </a:fgClr>
+            <a:bgClr>
+              <a:schemeClr val="bg2"/>
+            </a:bgClr>
+          </a:pattFill>
+        </p:spPr>
+        <p:style>
+          <a:lnRef idx="2">
+            <a:schemeClr val="accent1">
+              <a:shade val="15000"/>
+            </a:schemeClr>
+          </a:lnRef>
+          <a:fillRef idx="1">
+            <a:schemeClr val="accent1"/>
+          </a:fillRef>
+          <a:effectRef idx="0">
+            <a:schemeClr val="accent1"/>
+          </a:effectRef>
+          <a:fontRef idx="minor">
+            <a:schemeClr val="lt1"/>
+          </a:fontRef>
+        </p:style>
+        <p:txBody>
+          <a:bodyPr rtlCol="0" anchor="ctr"/>
+          <a:lstStyle/>
+          <a:p>
+            <a:pPr algn="ctr"/>
+            <a:endParaRPr lang="ko-KR" altLang="en-US"/>
+          </a:p>
+        </p:txBody>
+      </p:sp>
+      <p:sp>
+        <p:nvSpPr>
+          <p:cNvPr id="66" name="직사각형 65">
+            <a:extLst>
+              <a:ext uri="{FF2B5EF4-FFF2-40B4-BE49-F238E27FC236}">
+                <a16:creationId xmlns:a16="http://schemas.microsoft.com/office/drawing/2014/main" id="{5C4CF498-C2EC-1FC4-0992-BFF9CADB3C51}"/>
+              </a:ext>
+            </a:extLst>
+          </p:cNvPr>
+          <p:cNvSpPr/>
+          <p:nvPr/>
+        </p:nvSpPr>
+        <p:spPr>
+          <a:xfrm>
+            <a:off x="25153257" y="-11149781"/>
+            <a:ext cx="479440" cy="1651819"/>
+          </a:xfrm>
+          <a:prstGeom prst="rect">
+            <a:avLst/>
+          </a:prstGeom>
+          <a:pattFill prst="wdDnDiag">
+            <a:fgClr>
+              <a:srgbClr val="92D050"/>
+            </a:fgClr>
+            <a:bgClr>
+              <a:schemeClr val="bg2"/>
+            </a:bgClr>
+          </a:pattFill>
+        </p:spPr>
+        <p:style>
+          <a:lnRef idx="2">
+            <a:schemeClr val="accent1">
+              <a:shade val="15000"/>
+            </a:schemeClr>
+          </a:lnRef>
+          <a:fillRef idx="1">
+            <a:schemeClr val="accent1"/>
+          </a:fillRef>
+          <a:effectRef idx="0">
+            <a:schemeClr val="accent1"/>
+          </a:effectRef>
+          <a:fontRef idx="minor">
+            <a:schemeClr val="lt1"/>
+          </a:fontRef>
+        </p:style>
+        <p:txBody>
+          <a:bodyPr rtlCol="0" anchor="ctr"/>
+          <a:lstStyle/>
+          <a:p>
+            <a:pPr algn="ctr"/>
+            <a:endParaRPr lang="ko-KR" altLang="en-US"/>
+          </a:p>
+        </p:txBody>
+      </p:sp>
+      <p:sp>
+        <p:nvSpPr>
+          <p:cNvPr id="67" name="사다리꼴 66">
+            <a:extLst>
+              <a:ext uri="{FF2B5EF4-FFF2-40B4-BE49-F238E27FC236}">
+                <a16:creationId xmlns:a16="http://schemas.microsoft.com/office/drawing/2014/main" id="{43315E12-ACF4-1898-8083-9E38A79A87E4}"/>
+              </a:ext>
+            </a:extLst>
+          </p:cNvPr>
+          <p:cNvSpPr/>
+          <p:nvPr/>
+        </p:nvSpPr>
+        <p:spPr>
+          <a:xfrm flipV="1">
+            <a:off x="23526958" y="-13185061"/>
+            <a:ext cx="3687096" cy="2035279"/>
+          </a:xfrm>
+          <a:prstGeom prst="trapezoid">
+            <a:avLst>
+              <a:gd name="adj" fmla="val 79313"/>
+            </a:avLst>
+          </a:prstGeom>
+          <a:solidFill>
+            <a:srgbClr val="C00000"/>
+          </a:solidFill>
+        </p:spPr>
+        <p:style>
+          <a:lnRef idx="2">
+            <a:schemeClr val="accent1">
+              <a:shade val="15000"/>
+            </a:schemeClr>
+          </a:lnRef>
+          <a:fillRef idx="1">
+            <a:schemeClr val="accent1"/>
+          </a:fillRef>
+          <a:effectRef idx="0">
+            <a:schemeClr val="accent1"/>
+          </a:effectRef>
+          <a:fontRef idx="minor">
+            <a:schemeClr val="lt1"/>
+          </a:fontRef>
+        </p:style>
+        <p:txBody>
+          <a:bodyPr rtlCol="0" anchor="ctr"/>
+          <a:lstStyle/>
+          <a:p>
+            <a:pPr algn="ctr"/>
+            <a:endParaRPr lang="ko-KR" altLang="en-US"/>
+          </a:p>
+        </p:txBody>
+      </p:sp>
+      <p:sp>
+        <p:nvSpPr>
+          <p:cNvPr id="68" name="현 67">
+            <a:extLst>
+              <a:ext uri="{FF2B5EF4-FFF2-40B4-BE49-F238E27FC236}">
+                <a16:creationId xmlns:a16="http://schemas.microsoft.com/office/drawing/2014/main" id="{2F35F313-58BF-CA65-8F4C-0B0E2622795B}"/>
+              </a:ext>
+            </a:extLst>
+          </p:cNvPr>
+          <p:cNvSpPr/>
+          <p:nvPr/>
+        </p:nvSpPr>
+        <p:spPr>
+          <a:xfrm flipV="1">
+            <a:off x="22923024" y="-14123350"/>
+            <a:ext cx="4909026" cy="5510985"/>
+          </a:xfrm>
+          <a:prstGeom prst="chord">
+            <a:avLst>
+              <a:gd name="adj1" fmla="val 2681755"/>
+              <a:gd name="adj2" fmla="val 8121377"/>
+            </a:avLst>
+          </a:prstGeom>
+          <a:solidFill>
+            <a:srgbClr val="C00000"/>
+          </a:solidFill>
+        </p:spPr>
+        <p:style>
+          <a:lnRef idx="2">
+            <a:schemeClr val="accent1">
+              <a:shade val="15000"/>
+            </a:schemeClr>
+          </a:lnRef>
+          <a:fillRef idx="1">
+            <a:schemeClr val="accent1"/>
+          </a:fillRef>
+          <a:effectRef idx="0">
+            <a:schemeClr val="accent1"/>
+          </a:effectRef>
+          <a:fontRef idx="minor">
+            <a:schemeClr val="lt1"/>
+          </a:fontRef>
+        </p:style>
+        <p:txBody>
+          <a:bodyPr rtlCol="0" anchor="ctr"/>
+          <a:lstStyle/>
+          <a:p>
+            <a:pPr algn="ctr"/>
+            <a:endParaRPr lang="ko-KR" altLang="en-US"/>
+          </a:p>
+        </p:txBody>
+      </p:sp>
+      <p:sp>
+        <p:nvSpPr>
+          <p:cNvPr id="69" name="직사각형 68">
+            <a:extLst>
+              <a:ext uri="{FF2B5EF4-FFF2-40B4-BE49-F238E27FC236}">
+                <a16:creationId xmlns:a16="http://schemas.microsoft.com/office/drawing/2014/main" id="{18F59453-04C0-686D-8109-C84971A92066}"/>
+              </a:ext>
+            </a:extLst>
+          </p:cNvPr>
+          <p:cNvSpPr/>
+          <p:nvPr/>
+        </p:nvSpPr>
+        <p:spPr>
+          <a:xfrm rot="5400000">
+            <a:off x="14993663" y="1452121"/>
+            <a:ext cx="1102651" cy="1218241"/>
+          </a:xfrm>
+          <a:prstGeom prst="rect">
+            <a:avLst/>
+          </a:prstGeom>
+          <a:pattFill prst="wdUpDiag">
+            <a:fgClr>
+              <a:schemeClr val="accent2"/>
+            </a:fgClr>
+            <a:bgClr>
+              <a:schemeClr val="bg2"/>
+            </a:bgClr>
+          </a:pattFill>
+        </p:spPr>
+        <p:style>
+          <a:lnRef idx="2">
+            <a:schemeClr val="accent1">
+              <a:shade val="15000"/>
+            </a:schemeClr>
+          </a:lnRef>
+          <a:fillRef idx="1">
+            <a:schemeClr val="accent1"/>
+          </a:fillRef>
+          <a:effectRef idx="0">
+            <a:schemeClr val="accent1"/>
+          </a:effectRef>
+          <a:fontRef idx="minor">
+            <a:schemeClr val="lt1"/>
+          </a:fontRef>
+        </p:style>
+        <p:txBody>
+          <a:bodyPr rtlCol="0" anchor="ctr"/>
+          <a:lstStyle/>
+          <a:p>
+            <a:pPr algn="ctr"/>
+            <a:endParaRPr lang="ko-KR" altLang="en-US"/>
+          </a:p>
+        </p:txBody>
+      </p:sp>
+      <p:sp>
+        <p:nvSpPr>
+          <p:cNvPr id="70" name="평행 사변형 69">
+            <a:extLst>
+              <a:ext uri="{FF2B5EF4-FFF2-40B4-BE49-F238E27FC236}">
+                <a16:creationId xmlns:a16="http://schemas.microsoft.com/office/drawing/2014/main" id="{E1112B96-0F23-1305-08A6-F1A239E5F19F}"/>
+              </a:ext>
+            </a:extLst>
+          </p:cNvPr>
+          <p:cNvSpPr/>
+          <p:nvPr/>
+        </p:nvSpPr>
+        <p:spPr>
+          <a:xfrm>
+            <a:off x="19221858" y="-3136271"/>
+            <a:ext cx="4639625" cy="1504600"/>
+          </a:xfrm>
+          <a:prstGeom prst="parallelogram">
+            <a:avLst>
+              <a:gd name="adj" fmla="val 93397"/>
+            </a:avLst>
+          </a:prstGeom>
+          <a:pattFill prst="wdUpDiag">
+            <a:fgClr>
+              <a:schemeClr val="accent2"/>
+            </a:fgClr>
+            <a:bgClr>
+              <a:schemeClr val="bg2"/>
+            </a:bgClr>
+          </a:pattFill>
+        </p:spPr>
+        <p:style>
+          <a:lnRef idx="2">
+            <a:schemeClr val="accent1">
+              <a:shade val="15000"/>
+            </a:schemeClr>
+          </a:lnRef>
+          <a:fillRef idx="1">
+            <a:schemeClr val="accent1"/>
+          </a:fillRef>
+          <a:effectRef idx="0">
+            <a:schemeClr val="accent1"/>
+          </a:effectRef>
+          <a:fontRef idx="minor">
+            <a:schemeClr val="lt1"/>
+          </a:fontRef>
+        </p:style>
+        <p:txBody>
+          <a:bodyPr rtlCol="0" anchor="ctr"/>
+          <a:lstStyle/>
+          <a:p>
+            <a:pPr algn="ctr"/>
+            <a:endParaRPr lang="ko-KR" altLang="en-US"/>
+          </a:p>
+        </p:txBody>
+      </p:sp>
+      <p:sp>
+        <p:nvSpPr>
+          <p:cNvPr id="71" name="타원 70">
+            <a:extLst>
+              <a:ext uri="{FF2B5EF4-FFF2-40B4-BE49-F238E27FC236}">
+                <a16:creationId xmlns:a16="http://schemas.microsoft.com/office/drawing/2014/main" id="{B234ACE8-4FDD-F6C0-6EAD-BD9ECE223679}"/>
+              </a:ext>
+            </a:extLst>
+          </p:cNvPr>
+          <p:cNvSpPr/>
+          <p:nvPr/>
+        </p:nvSpPr>
+        <p:spPr>
+          <a:xfrm>
+            <a:off x="3895961" y="6139544"/>
+            <a:ext cx="341938" cy="353800"/>
+          </a:xfrm>
+          <a:prstGeom prst="ellipse">
+            <a:avLst/>
+          </a:prstGeom>
+          <a:solidFill>
+            <a:srgbClr val="FFFF00"/>
+          </a:solidFill>
+        </p:spPr>
+        <p:style>
+          <a:lnRef idx="2">
+            <a:schemeClr val="accent1">
+              <a:shade val="15000"/>
+            </a:schemeClr>
+          </a:lnRef>
+          <a:fillRef idx="1">
+            <a:schemeClr val="accent1"/>
+          </a:fillRef>
+          <a:effectRef idx="0">
+            <a:schemeClr val="accent1"/>
+          </a:effectRef>
+          <a:fontRef idx="minor">
+            <a:schemeClr val="lt1"/>
+          </a:fontRef>
+        </p:style>
+        <p:txBody>
+          <a:bodyPr rtlCol="0" anchor="ctr"/>
+          <a:lstStyle/>
+          <a:p>
+            <a:pPr algn="ctr"/>
+            <a:r>
+              <a:rPr lang="en-US" altLang="ko-KR" sz="1400" dirty="0">
+                <a:solidFill>
+                  <a:schemeClr val="tx1"/>
+                </a:solidFill>
+              </a:rPr>
+              <a:t>A</a:t>
+            </a:r>
+            <a:endParaRPr lang="ko-KR" altLang="en-US" dirty="0">
+              <a:solidFill>
+                <a:schemeClr val="tx1"/>
+              </a:solidFill>
+            </a:endParaRPr>
+          </a:p>
+        </p:txBody>
+      </p:sp>
+      <p:sp>
+        <p:nvSpPr>
+          <p:cNvPr id="81" name="직사각형 80">
+            <a:extLst>
+              <a:ext uri="{FF2B5EF4-FFF2-40B4-BE49-F238E27FC236}">
+                <a16:creationId xmlns:a16="http://schemas.microsoft.com/office/drawing/2014/main" id="{5569841C-267B-1ECF-7FA4-FD5526C0B6CC}"/>
+              </a:ext>
+            </a:extLst>
+          </p:cNvPr>
+          <p:cNvSpPr/>
+          <p:nvPr/>
+        </p:nvSpPr>
+        <p:spPr>
+          <a:xfrm>
+            <a:off x="3111500" y="3692167"/>
+            <a:ext cx="732211" cy="695683"/>
+          </a:xfrm>
+          <a:prstGeom prst="rect">
+            <a:avLst/>
+          </a:prstGeom>
+          <a:pattFill prst="wdDnDiag">
+            <a:fgClr>
+              <a:srgbClr val="92D050"/>
+            </a:fgClr>
+            <a:bgClr>
+              <a:schemeClr val="bg2"/>
+            </a:bgClr>
+          </a:pattFill>
+        </p:spPr>
+        <p:style>
+          <a:lnRef idx="2">
+            <a:schemeClr val="accent1">
+              <a:shade val="15000"/>
+            </a:schemeClr>
+          </a:lnRef>
+          <a:fillRef idx="1">
+            <a:schemeClr val="accent1"/>
+          </a:fillRef>
+          <a:effectRef idx="0">
+            <a:schemeClr val="accent1"/>
+          </a:effectRef>
+          <a:fontRef idx="minor">
+            <a:schemeClr val="lt1"/>
+          </a:fontRef>
+        </p:style>
+        <p:txBody>
+          <a:bodyPr rtlCol="0" anchor="ctr"/>
+          <a:lstStyle/>
+          <a:p>
+            <a:pPr algn="ctr"/>
+            <a:endParaRPr lang="ko-KR" altLang="en-US"/>
+          </a:p>
+        </p:txBody>
+      </p:sp>
+      <p:sp>
+        <p:nvSpPr>
+          <p:cNvPr id="82" name="평행 사변형 81">
+            <a:extLst>
+              <a:ext uri="{FF2B5EF4-FFF2-40B4-BE49-F238E27FC236}">
+                <a16:creationId xmlns:a16="http://schemas.microsoft.com/office/drawing/2014/main" id="{167561D3-C76D-1382-64FD-6377FAFBAFDE}"/>
+              </a:ext>
+            </a:extLst>
+          </p:cNvPr>
+          <p:cNvSpPr/>
+          <p:nvPr/>
+        </p:nvSpPr>
+        <p:spPr>
+          <a:xfrm>
+            <a:off x="8265841" y="-857251"/>
+            <a:ext cx="2135459" cy="545513"/>
+          </a:xfrm>
+          <a:prstGeom prst="parallelogram">
+            <a:avLst>
+              <a:gd name="adj" fmla="val 104370"/>
+            </a:avLst>
+          </a:prstGeom>
+          <a:pattFill prst="wdDnDiag">
+            <a:fgClr>
+              <a:srgbClr val="92D050"/>
+            </a:fgClr>
+            <a:bgClr>
+              <a:schemeClr val="bg2"/>
+            </a:bgClr>
+          </a:pattFill>
+        </p:spPr>
+        <p:style>
+          <a:lnRef idx="2">
+            <a:schemeClr val="accent1">
+              <a:shade val="15000"/>
+            </a:schemeClr>
+          </a:lnRef>
+          <a:fillRef idx="1">
+            <a:schemeClr val="accent1"/>
+          </a:fillRef>
+          <a:effectRef idx="0">
+            <a:schemeClr val="accent1"/>
+          </a:effectRef>
+          <a:fontRef idx="minor">
+            <a:schemeClr val="lt1"/>
+          </a:fontRef>
+        </p:style>
+        <p:txBody>
+          <a:bodyPr rtlCol="0" anchor="ctr"/>
+          <a:lstStyle/>
+          <a:p>
+            <a:pPr algn="ctr"/>
+            <a:endParaRPr lang="ko-KR" altLang="en-US"/>
+          </a:p>
+        </p:txBody>
+      </p:sp>
+      <p:sp>
+        <p:nvSpPr>
+          <p:cNvPr id="83" name="직사각형 82">
+            <a:extLst>
+              <a:ext uri="{FF2B5EF4-FFF2-40B4-BE49-F238E27FC236}">
+                <a16:creationId xmlns:a16="http://schemas.microsoft.com/office/drawing/2014/main" id="{5CAF5B60-CE25-51E0-1D0E-6C55D5623C3C}"/>
+              </a:ext>
+            </a:extLst>
+          </p:cNvPr>
+          <p:cNvSpPr/>
+          <p:nvPr/>
+        </p:nvSpPr>
+        <p:spPr>
+          <a:xfrm>
+            <a:off x="10757101" y="-4867953"/>
+            <a:ext cx="3464276" cy="517828"/>
+          </a:xfrm>
+          <a:prstGeom prst="rect">
+            <a:avLst/>
+          </a:prstGeom>
+          <a:pattFill prst="wdDnDiag">
+            <a:fgClr>
+              <a:srgbClr val="92D050"/>
+            </a:fgClr>
+            <a:bgClr>
+              <a:schemeClr val="bg2"/>
+            </a:bgClr>
+          </a:pattFill>
+        </p:spPr>
+        <p:style>
+          <a:lnRef idx="2">
+            <a:schemeClr val="accent1">
+              <a:shade val="15000"/>
+            </a:schemeClr>
+          </a:lnRef>
+          <a:fillRef idx="1">
+            <a:schemeClr val="accent1"/>
+          </a:fillRef>
+          <a:effectRef idx="0">
+            <a:schemeClr val="accent1"/>
+          </a:effectRef>
+          <a:fontRef idx="minor">
+            <a:schemeClr val="lt1"/>
+          </a:fontRef>
+        </p:style>
+        <p:txBody>
+          <a:bodyPr rtlCol="0" anchor="ctr"/>
+          <a:lstStyle/>
+          <a:p>
+            <a:pPr algn="ctr"/>
+            <a:endParaRPr lang="ko-KR" altLang="en-US"/>
+          </a:p>
+        </p:txBody>
+      </p:sp>
+      <p:sp>
+        <p:nvSpPr>
+          <p:cNvPr id="84" name="직사각형 83">
+            <a:extLst>
+              <a:ext uri="{FF2B5EF4-FFF2-40B4-BE49-F238E27FC236}">
+                <a16:creationId xmlns:a16="http://schemas.microsoft.com/office/drawing/2014/main" id="{B74B6AC8-072E-FDD6-FCFB-7E6BF08568C3}"/>
+              </a:ext>
+            </a:extLst>
+          </p:cNvPr>
+          <p:cNvSpPr/>
+          <p:nvPr/>
+        </p:nvSpPr>
+        <p:spPr>
+          <a:xfrm>
+            <a:off x="13620019" y="-803227"/>
+            <a:ext cx="589863" cy="1796954"/>
+          </a:xfrm>
+          <a:prstGeom prst="rect">
+            <a:avLst/>
+          </a:prstGeom>
+          <a:pattFill prst="wdDnDiag">
+            <a:fgClr>
+              <a:srgbClr val="92D050"/>
+            </a:fgClr>
+            <a:bgClr>
+              <a:schemeClr val="bg2"/>
+            </a:bgClr>
+          </a:pattFill>
+        </p:spPr>
+        <p:style>
+          <a:lnRef idx="2">
+            <a:schemeClr val="accent1">
+              <a:shade val="15000"/>
+            </a:schemeClr>
+          </a:lnRef>
+          <a:fillRef idx="1">
+            <a:schemeClr val="accent1"/>
+          </a:fillRef>
+          <a:effectRef idx="0">
+            <a:schemeClr val="accent1"/>
+          </a:effectRef>
+          <a:fontRef idx="minor">
+            <a:schemeClr val="lt1"/>
+          </a:fontRef>
+        </p:style>
+        <p:txBody>
+          <a:bodyPr rtlCol="0" anchor="ctr"/>
+          <a:lstStyle/>
+          <a:p>
+            <a:pPr algn="ctr"/>
+            <a:endParaRPr lang="ko-KR" altLang="en-US"/>
+          </a:p>
+        </p:txBody>
+      </p:sp>
+      <p:sp>
+        <p:nvSpPr>
+          <p:cNvPr id="85" name="평행 사변형 84">
+            <a:extLst>
+              <a:ext uri="{FF2B5EF4-FFF2-40B4-BE49-F238E27FC236}">
+                <a16:creationId xmlns:a16="http://schemas.microsoft.com/office/drawing/2014/main" id="{84F823E8-90BC-5910-0DB2-749E6329E00E}"/>
+              </a:ext>
+            </a:extLst>
+          </p:cNvPr>
+          <p:cNvSpPr/>
+          <p:nvPr/>
+        </p:nvSpPr>
+        <p:spPr>
+          <a:xfrm>
+            <a:off x="17891525" y="-803227"/>
+            <a:ext cx="1596625" cy="545513"/>
+          </a:xfrm>
+          <a:prstGeom prst="parallelogram">
+            <a:avLst>
+              <a:gd name="adj" fmla="val 100179"/>
+            </a:avLst>
+          </a:prstGeom>
+          <a:pattFill prst="wdDnDiag">
+            <a:fgClr>
+              <a:srgbClr val="92D050"/>
+            </a:fgClr>
+            <a:bgClr>
+              <a:schemeClr val="bg2"/>
+            </a:bgClr>
+          </a:pattFill>
+        </p:spPr>
+        <p:style>
+          <a:lnRef idx="2">
+            <a:schemeClr val="accent1">
+              <a:shade val="15000"/>
+            </a:schemeClr>
+          </a:lnRef>
+          <a:fillRef idx="1">
+            <a:schemeClr val="accent1"/>
+          </a:fillRef>
+          <a:effectRef idx="0">
+            <a:schemeClr val="accent1"/>
+          </a:effectRef>
+          <a:fontRef idx="minor">
+            <a:schemeClr val="lt1"/>
+          </a:fontRef>
+        </p:style>
+        <p:txBody>
+          <a:bodyPr rtlCol="0" anchor="ctr"/>
+          <a:lstStyle/>
+          <a:p>
+            <a:pPr algn="ctr"/>
+            <a:endParaRPr lang="ko-KR" altLang="en-US"/>
+          </a:p>
+        </p:txBody>
+      </p:sp>
+      <p:sp>
+        <p:nvSpPr>
+          <p:cNvPr id="86" name="평행 사변형 85">
+            <a:extLst>
+              <a:ext uri="{FF2B5EF4-FFF2-40B4-BE49-F238E27FC236}">
+                <a16:creationId xmlns:a16="http://schemas.microsoft.com/office/drawing/2014/main" id="{7CD62A82-87E4-0CF6-3C1D-696E93CBF6BF}"/>
+              </a:ext>
+            </a:extLst>
+          </p:cNvPr>
+          <p:cNvSpPr/>
+          <p:nvPr/>
+        </p:nvSpPr>
+        <p:spPr>
+          <a:xfrm>
+            <a:off x="17983196" y="1404602"/>
+            <a:ext cx="1596625" cy="545513"/>
+          </a:xfrm>
+          <a:prstGeom prst="parallelogram">
+            <a:avLst>
+              <a:gd name="adj" fmla="val 93727"/>
+            </a:avLst>
+          </a:prstGeom>
+          <a:pattFill prst="wdDnDiag">
+            <a:fgClr>
+              <a:srgbClr val="92D050"/>
+            </a:fgClr>
+            <a:bgClr>
+              <a:schemeClr val="bg2"/>
+            </a:bgClr>
+          </a:pattFill>
+        </p:spPr>
+        <p:style>
+          <a:lnRef idx="2">
+            <a:schemeClr val="accent1">
+              <a:shade val="15000"/>
+            </a:schemeClr>
+          </a:lnRef>
+          <a:fillRef idx="1">
+            <a:schemeClr val="accent1"/>
+          </a:fillRef>
+          <a:effectRef idx="0">
+            <a:schemeClr val="accent1"/>
+          </a:effectRef>
+          <a:fontRef idx="minor">
+            <a:schemeClr val="lt1"/>
+          </a:fontRef>
+        </p:style>
+        <p:txBody>
+          <a:bodyPr rtlCol="0" anchor="ctr"/>
+          <a:lstStyle/>
+          <a:p>
+            <a:pPr algn="ctr"/>
+            <a:endParaRPr lang="ko-KR" altLang="en-US"/>
+          </a:p>
+        </p:txBody>
+      </p:sp>
+      <p:sp>
+        <p:nvSpPr>
+          <p:cNvPr id="87" name="사다리꼴 86">
+            <a:extLst>
+              <a:ext uri="{FF2B5EF4-FFF2-40B4-BE49-F238E27FC236}">
+                <a16:creationId xmlns:a16="http://schemas.microsoft.com/office/drawing/2014/main" id="{15545736-31C6-6CB1-7B70-8D7184BB7845}"/>
+              </a:ext>
+            </a:extLst>
+          </p:cNvPr>
+          <p:cNvSpPr/>
+          <p:nvPr/>
+        </p:nvSpPr>
+        <p:spPr>
+          <a:xfrm>
+            <a:off x="23861483" y="-7463304"/>
+            <a:ext cx="3037219" cy="767443"/>
+          </a:xfrm>
+          <a:prstGeom prst="trapezoid">
+            <a:avLst>
+              <a:gd name="adj" fmla="val 110389"/>
+            </a:avLst>
+          </a:prstGeom>
+          <a:pattFill prst="wdDnDiag">
+            <a:fgClr>
+              <a:srgbClr val="92D050"/>
+            </a:fgClr>
+            <a:bgClr>
+              <a:schemeClr val="bg2"/>
+            </a:bgClr>
+          </a:pattFill>
+        </p:spPr>
+        <p:style>
+          <a:lnRef idx="2">
+            <a:schemeClr val="accent1">
+              <a:shade val="15000"/>
+            </a:schemeClr>
+          </a:lnRef>
+          <a:fillRef idx="1">
+            <a:schemeClr val="accent1"/>
+          </a:fillRef>
+          <a:effectRef idx="0">
+            <a:schemeClr val="accent1"/>
+          </a:effectRef>
+          <a:fontRef idx="minor">
+            <a:schemeClr val="lt1"/>
+          </a:fontRef>
+        </p:style>
+        <p:txBody>
+          <a:bodyPr rtlCol="0" anchor="ctr"/>
+          <a:lstStyle/>
+          <a:p>
+            <a:pPr algn="ctr"/>
+            <a:endParaRPr lang="ko-KR" altLang="en-US"/>
+          </a:p>
+        </p:txBody>
+      </p:sp>
+      <p:sp>
+        <p:nvSpPr>
+          <p:cNvPr id="88" name="평행 사변형 87">
+            <a:extLst>
+              <a:ext uri="{FF2B5EF4-FFF2-40B4-BE49-F238E27FC236}">
+                <a16:creationId xmlns:a16="http://schemas.microsoft.com/office/drawing/2014/main" id="{018E23E7-9FDB-DD02-AC1D-B785926B3F94}"/>
+              </a:ext>
+            </a:extLst>
+          </p:cNvPr>
+          <p:cNvSpPr/>
+          <p:nvPr/>
+        </p:nvSpPr>
+        <p:spPr>
+          <a:xfrm>
+            <a:off x="18404684" y="-7466937"/>
+            <a:ext cx="1596625" cy="767443"/>
+          </a:xfrm>
+          <a:prstGeom prst="parallelogram">
+            <a:avLst>
+              <a:gd name="adj" fmla="val 100179"/>
+            </a:avLst>
+          </a:prstGeom>
+          <a:pattFill prst="wdDnDiag">
+            <a:fgClr>
+              <a:srgbClr val="92D050"/>
+            </a:fgClr>
+            <a:bgClr>
+              <a:schemeClr val="bg2"/>
+            </a:bgClr>
+          </a:pattFill>
+        </p:spPr>
+        <p:style>
+          <a:lnRef idx="2">
+            <a:schemeClr val="accent1">
+              <a:shade val="15000"/>
+            </a:schemeClr>
+          </a:lnRef>
+          <a:fillRef idx="1">
+            <a:schemeClr val="accent1"/>
+          </a:fillRef>
+          <a:effectRef idx="0">
+            <a:schemeClr val="accent1"/>
+          </a:effectRef>
+          <a:fontRef idx="minor">
+            <a:schemeClr val="lt1"/>
+          </a:fontRef>
+        </p:style>
+        <p:txBody>
+          <a:bodyPr rtlCol="0" anchor="ctr"/>
+          <a:lstStyle/>
+          <a:p>
+            <a:pPr algn="ctr"/>
+            <a:endParaRPr lang="ko-KR" altLang="en-US"/>
+          </a:p>
+        </p:txBody>
+      </p:sp>
+      <p:sp>
+        <p:nvSpPr>
+          <p:cNvPr id="89" name="타원 88">
+            <a:extLst>
+              <a:ext uri="{FF2B5EF4-FFF2-40B4-BE49-F238E27FC236}">
+                <a16:creationId xmlns:a16="http://schemas.microsoft.com/office/drawing/2014/main" id="{CDADE4CF-09A0-6C00-E7EC-5D6F15B60BAB}"/>
+              </a:ext>
+            </a:extLst>
+          </p:cNvPr>
+          <p:cNvSpPr/>
+          <p:nvPr/>
+        </p:nvSpPr>
+        <p:spPr>
+          <a:xfrm>
+            <a:off x="4748534" y="4986548"/>
+            <a:ext cx="341938" cy="353801"/>
+          </a:xfrm>
+          <a:prstGeom prst="ellipse">
+            <a:avLst/>
+          </a:prstGeom>
+          <a:solidFill>
+            <a:srgbClr val="FFFF00"/>
+          </a:solidFill>
+        </p:spPr>
+        <p:style>
+          <a:lnRef idx="2">
+            <a:schemeClr val="accent1">
+              <a:shade val="15000"/>
+            </a:schemeClr>
+          </a:lnRef>
+          <a:fillRef idx="1">
+            <a:schemeClr val="accent1"/>
+          </a:fillRef>
+          <a:effectRef idx="0">
+            <a:schemeClr val="accent1"/>
+          </a:effectRef>
+          <a:fontRef idx="minor">
+            <a:schemeClr val="lt1"/>
+          </a:fontRef>
+        </p:style>
+        <p:txBody>
+          <a:bodyPr rtlCol="0" anchor="ctr"/>
+          <a:lstStyle/>
+          <a:p>
+            <a:pPr algn="ctr"/>
+            <a:r>
+              <a:rPr lang="en-US" altLang="ko-KR" sz="1400" dirty="0">
+                <a:solidFill>
+                  <a:schemeClr val="tx1"/>
+                </a:solidFill>
+              </a:rPr>
+              <a:t>B</a:t>
+            </a:r>
+            <a:endParaRPr lang="ko-KR" altLang="en-US" dirty="0">
+              <a:solidFill>
+                <a:schemeClr val="tx1"/>
+              </a:solidFill>
+            </a:endParaRPr>
+          </a:p>
+        </p:txBody>
+      </p:sp>
+      <p:sp>
+        <p:nvSpPr>
+          <p:cNvPr id="90" name="타원 89">
+            <a:extLst>
+              <a:ext uri="{FF2B5EF4-FFF2-40B4-BE49-F238E27FC236}">
+                <a16:creationId xmlns:a16="http://schemas.microsoft.com/office/drawing/2014/main" id="{A00B33D9-6FDD-12DF-03E0-AD88FF52D70C}"/>
+              </a:ext>
+            </a:extLst>
+          </p:cNvPr>
+          <p:cNvSpPr/>
+          <p:nvPr/>
+        </p:nvSpPr>
+        <p:spPr>
+          <a:xfrm>
+            <a:off x="5044126" y="3291515"/>
+            <a:ext cx="341938" cy="353801"/>
+          </a:xfrm>
+          <a:prstGeom prst="ellipse">
+            <a:avLst/>
+          </a:prstGeom>
+          <a:solidFill>
+            <a:srgbClr val="FFFF00"/>
+          </a:solidFill>
+        </p:spPr>
+        <p:style>
+          <a:lnRef idx="2">
+            <a:schemeClr val="accent1">
+              <a:shade val="15000"/>
+            </a:schemeClr>
+          </a:lnRef>
+          <a:fillRef idx="1">
+            <a:schemeClr val="accent1"/>
+          </a:fillRef>
+          <a:effectRef idx="0">
+            <a:schemeClr val="accent1"/>
+          </a:effectRef>
+          <a:fontRef idx="minor">
+            <a:schemeClr val="lt1"/>
+          </a:fontRef>
+        </p:style>
+        <p:txBody>
+          <a:bodyPr rtlCol="0" anchor="ctr"/>
+          <a:lstStyle/>
+          <a:p>
+            <a:pPr algn="ctr"/>
+            <a:r>
+              <a:rPr lang="en-US" altLang="ko-KR" sz="1400" dirty="0">
+                <a:solidFill>
+                  <a:schemeClr val="tx1"/>
+                </a:solidFill>
+              </a:rPr>
+              <a:t>C</a:t>
+            </a:r>
+            <a:endParaRPr lang="ko-KR" altLang="en-US" dirty="0">
+              <a:solidFill>
+                <a:schemeClr val="tx1"/>
+              </a:solidFill>
+            </a:endParaRPr>
+          </a:p>
+        </p:txBody>
+      </p:sp>
+      <p:sp>
+        <p:nvSpPr>
+          <p:cNvPr id="91" name="타원 90">
+            <a:extLst>
+              <a:ext uri="{FF2B5EF4-FFF2-40B4-BE49-F238E27FC236}">
+                <a16:creationId xmlns:a16="http://schemas.microsoft.com/office/drawing/2014/main" id="{9F6B0272-DEF2-5971-6F91-DA6626973228}"/>
+              </a:ext>
+            </a:extLst>
+          </p:cNvPr>
+          <p:cNvSpPr/>
+          <p:nvPr/>
+        </p:nvSpPr>
+        <p:spPr>
+          <a:xfrm>
+            <a:off x="5615793" y="4264811"/>
+            <a:ext cx="341938" cy="353801"/>
+          </a:xfrm>
+          <a:prstGeom prst="ellipse">
+            <a:avLst/>
+          </a:prstGeom>
+          <a:solidFill>
+            <a:srgbClr val="FFFF00"/>
+          </a:solidFill>
+        </p:spPr>
+        <p:style>
+          <a:lnRef idx="2">
+            <a:schemeClr val="accent1">
+              <a:shade val="15000"/>
+            </a:schemeClr>
+          </a:lnRef>
+          <a:fillRef idx="1">
+            <a:schemeClr val="accent1"/>
+          </a:fillRef>
+          <a:effectRef idx="0">
+            <a:schemeClr val="accent1"/>
+          </a:effectRef>
+          <a:fontRef idx="minor">
+            <a:schemeClr val="lt1"/>
+          </a:fontRef>
+        </p:style>
+        <p:txBody>
+          <a:bodyPr rtlCol="0" anchor="ctr"/>
+          <a:lstStyle/>
+          <a:p>
+            <a:pPr algn="ctr"/>
+            <a:r>
+              <a:rPr lang="en-US" altLang="ko-KR" sz="1400" dirty="0">
+                <a:solidFill>
+                  <a:schemeClr val="tx1"/>
+                </a:solidFill>
+              </a:rPr>
+              <a:t>D</a:t>
+            </a:r>
+            <a:endParaRPr lang="ko-KR" altLang="en-US" dirty="0">
+              <a:solidFill>
+                <a:schemeClr val="tx1"/>
+              </a:solidFill>
+            </a:endParaRPr>
+          </a:p>
+        </p:txBody>
+      </p:sp>
+      <p:sp>
+        <p:nvSpPr>
+          <p:cNvPr id="92" name="타원 91">
+            <a:extLst>
+              <a:ext uri="{FF2B5EF4-FFF2-40B4-BE49-F238E27FC236}">
+                <a16:creationId xmlns:a16="http://schemas.microsoft.com/office/drawing/2014/main" id="{D42E4416-AF65-BE9E-3BBA-E7700D61757F}"/>
+              </a:ext>
+            </a:extLst>
+          </p:cNvPr>
+          <p:cNvSpPr/>
+          <p:nvPr/>
+        </p:nvSpPr>
+        <p:spPr>
+          <a:xfrm>
+            <a:off x="6461662" y="2230370"/>
+            <a:ext cx="341938" cy="353801"/>
+          </a:xfrm>
+          <a:prstGeom prst="ellipse">
+            <a:avLst/>
+          </a:prstGeom>
+          <a:solidFill>
+            <a:srgbClr val="FFFF00"/>
+          </a:solidFill>
+        </p:spPr>
+        <p:style>
+          <a:lnRef idx="2">
+            <a:schemeClr val="accent1">
+              <a:shade val="15000"/>
+            </a:schemeClr>
+          </a:lnRef>
+          <a:fillRef idx="1">
+            <a:schemeClr val="accent1"/>
+          </a:fillRef>
+          <a:effectRef idx="0">
+            <a:schemeClr val="accent1"/>
+          </a:effectRef>
+          <a:fontRef idx="minor">
+            <a:schemeClr val="lt1"/>
+          </a:fontRef>
+        </p:style>
+        <p:txBody>
+          <a:bodyPr rtlCol="0" anchor="ctr"/>
+          <a:lstStyle/>
+          <a:p>
+            <a:pPr algn="ctr"/>
+            <a:r>
+              <a:rPr lang="en-US" altLang="ko-KR" sz="1400" dirty="0">
+                <a:solidFill>
+                  <a:schemeClr val="tx1"/>
+                </a:solidFill>
+              </a:rPr>
+              <a:t>E</a:t>
+            </a:r>
+            <a:endParaRPr lang="ko-KR" altLang="en-US" dirty="0">
+              <a:solidFill>
+                <a:schemeClr val="tx1"/>
+              </a:solidFill>
+            </a:endParaRPr>
+          </a:p>
+        </p:txBody>
+      </p:sp>
+      <p:sp>
+        <p:nvSpPr>
+          <p:cNvPr id="93" name="TextBox 92">
+            <a:extLst>
+              <a:ext uri="{FF2B5EF4-FFF2-40B4-BE49-F238E27FC236}">
+                <a16:creationId xmlns:a16="http://schemas.microsoft.com/office/drawing/2014/main" id="{5643330D-3ABE-F10B-5C40-83D20A57A275}"/>
+              </a:ext>
+            </a:extLst>
+          </p:cNvPr>
+          <p:cNvSpPr txBox="1"/>
+          <p:nvPr/>
+        </p:nvSpPr>
+        <p:spPr>
+          <a:xfrm>
+            <a:off x="-1447800" y="-11544300"/>
+            <a:ext cx="8251400" cy="2800767"/>
+          </a:xfrm>
+          <a:prstGeom prst="rect">
+            <a:avLst/>
+          </a:prstGeom>
+          <a:noFill/>
+        </p:spPr>
+        <p:txBody>
+          <a:bodyPr wrap="square" rtlCol="0">
+            <a:spAutoFit/>
+          </a:bodyPr>
+          <a:lstStyle/>
+          <a:p>
+            <a:r>
+              <a:rPr lang="ko-KR" altLang="en-US" sz="8800" b="1" dirty="0"/>
+              <a:t>숲 스테이지</a:t>
+            </a:r>
+            <a:endParaRPr lang="en-US" altLang="ko-KR" sz="8800" b="1" dirty="0"/>
+          </a:p>
+          <a:p>
+            <a:endParaRPr lang="ko-KR" altLang="en-US" sz="8800" b="1" dirty="0"/>
           </a:p>
         </p:txBody>
       </p:sp>
@@ -5663,4 +7597,319 @@
     </a:ext>
   </a:extLst>
 </a:theme>
+</file>
+
+<file path=ppt/theme/theme2.xml><?xml version="1.0" encoding="utf-8"?>
+<a:theme xmlns:a="http://schemas.openxmlformats.org/drawingml/2006/main" name="Office 테마">
+  <a:themeElements>
+    <a:clrScheme name="Office">
+      <a:dk1>
+        <a:sysClr val="windowText" lastClr="000000"/>
+      </a:dk1>
+      <a:lt1>
+        <a:sysClr val="window" lastClr="FFFFFF"/>
+      </a:lt1>
+      <a:dk2>
+        <a:srgbClr val="0E2841"/>
+      </a:dk2>
+      <a:lt2>
+        <a:srgbClr val="E8E8E8"/>
+      </a:lt2>
+      <a:accent1>
+        <a:srgbClr val="156082"/>
+      </a:accent1>
+      <a:accent2>
+        <a:srgbClr val="E97132"/>
+      </a:accent2>
+      <a:accent3>
+        <a:srgbClr val="196B24"/>
+      </a:accent3>
+      <a:accent4>
+        <a:srgbClr val="0F9ED5"/>
+      </a:accent4>
+      <a:accent5>
+        <a:srgbClr val="A02B93"/>
+      </a:accent5>
+      <a:accent6>
+        <a:srgbClr val="4EA72E"/>
+      </a:accent6>
+      <a:hlink>
+        <a:srgbClr val="467886"/>
+      </a:hlink>
+      <a:folHlink>
+        <a:srgbClr val="96607D"/>
+      </a:folHlink>
+    </a:clrScheme>
+    <a:fontScheme name="Office">
+      <a:majorFont>
+        <a:latin typeface="맑은 고딕" panose="02110004020202020204"/>
+        <a:ea typeface=""/>
+        <a:cs typeface=""/>
+        <a:font script="Jpan" typeface="游ゴシック Light"/>
+        <a:font script="Hang" typeface="맑은 고딕"/>
+        <a:font script="Hans" typeface="等线 Light"/>
+        <a:font script="Hant" typeface="新細明體"/>
+        <a:font script="Arab" typeface="Times New Roman"/>
+        <a:font script="Hebr" typeface="Times New Roman"/>
+        <a:font script="Thai" typeface="Angsana New"/>
+        <a:font script="Ethi" typeface="Nyala"/>
+        <a:font script="Beng" typeface="Vrinda"/>
+        <a:font script="Gujr" typeface="Shruti"/>
+        <a:font script="Khmr" typeface="MoolBoran"/>
+        <a:font script="Knda" typeface="Tunga"/>
+        <a:font script="Guru" typeface="Raavi"/>
+        <a:font script="Cans" typeface="Euphemia"/>
+        <a:font script="Cher" typeface="Plantagenet Cherokee"/>
+        <a:font script="Yiii" typeface="Microsoft Yi Baiti"/>
+        <a:font script="Tibt" typeface="Microsoft Himalaya"/>
+        <a:font script="Thaa" typeface="MV Boli"/>
+        <a:font script="Deva" typeface="Mangal"/>
+        <a:font script="Telu" typeface="Gautami"/>
+        <a:font script="Taml" typeface="Latha"/>
+        <a:font script="Syrc" typeface="Estrangelo Edessa"/>
+        <a:font script="Orya" typeface="Kalinga"/>
+        <a:font script="Mlym" typeface="Kartika"/>
+        <a:font script="Laoo" typeface="DokChampa"/>
+        <a:font script="Sinh" typeface="Iskoola Pota"/>
+        <a:font script="Mong" typeface="Mongolian Baiti"/>
+        <a:font script="Viet" typeface="Times New Roman"/>
+        <a:font script="Uigh" typeface="Microsoft Uighur"/>
+        <a:font script="Geor" typeface="Sylfaen"/>
+        <a:font script="Armn" typeface="Arial"/>
+        <a:font script="Bugi" typeface="Leelawadee UI"/>
+        <a:font script="Bopo" typeface="Microsoft JhengHei"/>
+        <a:font script="Java" typeface="Javanese Text"/>
+        <a:font script="Lisu" typeface="Segoe UI"/>
+        <a:font script="Mymr" typeface="Myanmar Text"/>
+        <a:font script="Nkoo" typeface="Ebrima"/>
+        <a:font script="Olck" typeface="Nirmala UI"/>
+        <a:font script="Osma" typeface="Ebrima"/>
+        <a:font script="Phag" typeface="Phagspa"/>
+        <a:font script="Syrn" typeface="Estrangelo Edessa"/>
+        <a:font script="Syrj" typeface="Estrangelo Edessa"/>
+        <a:font script="Syre" typeface="Estrangelo Edessa"/>
+        <a:font script="Sora" typeface="Nirmala UI"/>
+        <a:font script="Tale" typeface="Microsoft Tai Le"/>
+        <a:font script="Talu" typeface="Microsoft New Tai Lue"/>
+        <a:font script="Tfng" typeface="Ebrima"/>
+      </a:majorFont>
+      <a:minorFont>
+        <a:latin typeface="맑은 고딕" panose="02110004020202020204"/>
+        <a:ea typeface=""/>
+        <a:cs typeface=""/>
+        <a:font script="Jpan" typeface="游ゴシック"/>
+        <a:font script="Hang" typeface="맑은 고딕"/>
+        <a:font script="Hans" typeface="等线"/>
+        <a:font script="Hant" typeface="新細明體"/>
+        <a:font script="Arab" typeface="Arial"/>
+        <a:font script="Hebr" typeface="Arial"/>
+        <a:font script="Thai" typeface="Cordia New"/>
+        <a:font script="Ethi" typeface="Nyala"/>
+        <a:font script="Beng" typeface="Vrinda"/>
+        <a:font script="Gujr" typeface="Shruti"/>
+        <a:font script="Khmr" typeface="DaunPenh"/>
+        <a:font script="Knda" typeface="Tunga"/>
+        <a:font script="Guru" typeface="Raavi"/>
+        <a:font script="Cans" typeface="Euphemia"/>
+        <a:font script="Cher" typeface="Plantagenet Cherokee"/>
+        <a:font script="Yiii" typeface="Microsoft Yi Baiti"/>
+        <a:font script="Tibt" typeface="Microsoft Himalaya"/>
+        <a:font script="Thaa" typeface="MV Boli"/>
+        <a:font script="Deva" typeface="Mangal"/>
+        <a:font script="Telu" typeface="Gautami"/>
+        <a:font script="Taml" typeface="Latha"/>
+        <a:font script="Syrc" typeface="Estrangelo Edessa"/>
+        <a:font script="Orya" typeface="Kalinga"/>
+        <a:font script="Mlym" typeface="Kartika"/>
+        <a:font script="Laoo" typeface="DokChampa"/>
+        <a:font script="Sinh" typeface="Iskoola Pota"/>
+        <a:font script="Mong" typeface="Mongolian Baiti"/>
+        <a:font script="Viet" typeface="Arial"/>
+        <a:font script="Uigh" typeface="Microsoft Uighur"/>
+        <a:font script="Geor" typeface="Sylfaen"/>
+        <a:font script="Armn" typeface="Arial"/>
+        <a:font script="Bugi" typeface="Leelawadee UI"/>
+        <a:font script="Bopo" typeface="Microsoft JhengHei"/>
+        <a:font script="Java" typeface="Javanese Text"/>
+        <a:font script="Lisu" typeface="Segoe UI"/>
+        <a:font script="Mymr" typeface="Myanmar Text"/>
+        <a:font script="Nkoo" typeface="Ebrima"/>
+        <a:font script="Olck" typeface="Nirmala UI"/>
+        <a:font script="Osma" typeface="Ebrima"/>
+        <a:font script="Phag" typeface="Phagspa"/>
+        <a:font script="Syrn" typeface="Estrangelo Edessa"/>
+        <a:font script="Syrj" typeface="Estrangelo Edessa"/>
+        <a:font script="Syre" typeface="Estrangelo Edessa"/>
+        <a:font script="Sora" typeface="Nirmala UI"/>
+        <a:font script="Tale" typeface="Microsoft Tai Le"/>
+        <a:font script="Talu" typeface="Microsoft New Tai Lue"/>
+        <a:font script="Tfng" typeface="Ebrima"/>
+      </a:minorFont>
+    </a:fontScheme>
+    <a:fmtScheme name="Office">
+      <a:fillStyleLst>
+        <a:solidFill>
+          <a:schemeClr val="phClr"/>
+        </a:solidFill>
+        <a:gradFill rotWithShape="1">
+          <a:gsLst>
+            <a:gs pos="0">
+              <a:schemeClr val="phClr">
+                <a:lumMod val="110000"/>
+                <a:satMod val="105000"/>
+                <a:tint val="67000"/>
+              </a:schemeClr>
+            </a:gs>
+            <a:gs pos="50000">
+              <a:schemeClr val="phClr">
+                <a:lumMod val="105000"/>
+                <a:satMod val="103000"/>
+                <a:tint val="73000"/>
+              </a:schemeClr>
+            </a:gs>
+            <a:gs pos="100000">
+              <a:schemeClr val="phClr">
+                <a:lumMod val="105000"/>
+                <a:satMod val="109000"/>
+                <a:tint val="81000"/>
+              </a:schemeClr>
+            </a:gs>
+          </a:gsLst>
+          <a:lin ang="5400000" scaled="0"/>
+        </a:gradFill>
+        <a:gradFill rotWithShape="1">
+          <a:gsLst>
+            <a:gs pos="0">
+              <a:schemeClr val="phClr">
+                <a:satMod val="103000"/>
+                <a:lumMod val="102000"/>
+                <a:tint val="94000"/>
+              </a:schemeClr>
+            </a:gs>
+            <a:gs pos="50000">
+              <a:schemeClr val="phClr">
+                <a:satMod val="110000"/>
+                <a:lumMod val="100000"/>
+                <a:shade val="100000"/>
+              </a:schemeClr>
+            </a:gs>
+            <a:gs pos="100000">
+              <a:schemeClr val="phClr">
+                <a:lumMod val="99000"/>
+                <a:satMod val="120000"/>
+                <a:shade val="78000"/>
+              </a:schemeClr>
+            </a:gs>
+          </a:gsLst>
+          <a:lin ang="5400000" scaled="0"/>
+        </a:gradFill>
+      </a:fillStyleLst>
+      <a:lnStyleLst>
+        <a:ln w="12700" cap="flat" cmpd="sng" algn="ctr">
+          <a:solidFill>
+            <a:schemeClr val="phClr"/>
+          </a:solidFill>
+          <a:prstDash val="solid"/>
+          <a:miter lim="800000"/>
+        </a:ln>
+        <a:ln w="19050" cap="flat" cmpd="sng" algn="ctr">
+          <a:solidFill>
+            <a:schemeClr val="phClr"/>
+          </a:solidFill>
+          <a:prstDash val="solid"/>
+          <a:miter lim="800000"/>
+        </a:ln>
+        <a:ln w="25400" cap="flat" cmpd="sng" algn="ctr">
+          <a:solidFill>
+            <a:schemeClr val="phClr"/>
+          </a:solidFill>
+          <a:prstDash val="solid"/>
+          <a:miter lim="800000"/>
+        </a:ln>
+      </a:lnStyleLst>
+      <a:effectStyleLst>
+        <a:effectStyle>
+          <a:effectLst/>
+        </a:effectStyle>
+        <a:effectStyle>
+          <a:effectLst/>
+        </a:effectStyle>
+        <a:effectStyle>
+          <a:effectLst>
+            <a:outerShdw blurRad="57150" dist="19050" dir="5400000" algn="ctr" rotWithShape="0">
+              <a:srgbClr val="000000">
+                <a:alpha val="63000"/>
+              </a:srgbClr>
+            </a:outerShdw>
+          </a:effectLst>
+        </a:effectStyle>
+      </a:effectStyleLst>
+      <a:bgFillStyleLst>
+        <a:solidFill>
+          <a:schemeClr val="phClr"/>
+        </a:solidFill>
+        <a:solidFill>
+          <a:schemeClr val="phClr">
+            <a:tint val="95000"/>
+            <a:satMod val="170000"/>
+          </a:schemeClr>
+        </a:solidFill>
+        <a:gradFill rotWithShape="1">
+          <a:gsLst>
+            <a:gs pos="0">
+              <a:schemeClr val="phClr">
+                <a:tint val="93000"/>
+                <a:satMod val="150000"/>
+                <a:shade val="98000"/>
+                <a:lumMod val="102000"/>
+              </a:schemeClr>
+            </a:gs>
+            <a:gs pos="50000">
+              <a:schemeClr val="phClr">
+                <a:tint val="98000"/>
+                <a:satMod val="130000"/>
+                <a:shade val="90000"/>
+                <a:lumMod val="103000"/>
+              </a:schemeClr>
+            </a:gs>
+            <a:gs pos="100000">
+              <a:schemeClr val="phClr">
+                <a:shade val="63000"/>
+                <a:satMod val="120000"/>
+              </a:schemeClr>
+            </a:gs>
+          </a:gsLst>
+          <a:lin ang="5400000" scaled="0"/>
+        </a:gradFill>
+      </a:bgFillStyleLst>
+    </a:fmtScheme>
+  </a:themeElements>
+  <a:objectDefaults>
+    <a:lnDef>
+      <a:spPr/>
+      <a:bodyPr/>
+      <a:lstStyle/>
+      <a:style>
+        <a:lnRef idx="2">
+          <a:schemeClr val="accent1"/>
+        </a:lnRef>
+        <a:fillRef idx="0">
+          <a:schemeClr val="accent1"/>
+        </a:fillRef>
+        <a:effectRef idx="1">
+          <a:schemeClr val="accent1"/>
+        </a:effectRef>
+        <a:fontRef idx="minor">
+          <a:schemeClr val="tx1"/>
+        </a:fontRef>
+      </a:style>
+    </a:lnDef>
+  </a:objectDefaults>
+  <a:extraClrSchemeLst/>
+  <a:extLst>
+    <a:ext uri="{05A4C25C-085E-4340-85A3-A5531E510DB2}">
+      <thm15:themeFamily xmlns:thm15="http://schemas.microsoft.com/office/thememl/2012/main" name="Office Theme" id="{2E142A2C-CD16-42D6-873A-C26D2A0506FA}" vid="{1BDDFF52-6CD6-40A5-AB3C-68EB2F1E4D0A}"/>
+    </a:ext>
+  </a:extLst>
+</a:theme>
 </file>
--- a/기획서/레벨디자인.pptx
+++ b/기획서/레벨디자인.pptx
@@ -107,6 +107,11 @@
       </a:defRPr>
     </a:lvl9pPr>
   </p:defaultTextStyle>
+  <p:extLst>
+    <p:ext uri="{EFAFB233-063F-42B5-8137-9DF3F51BA10A}">
+      <p15:sldGuideLst xmlns:p15="http://schemas.microsoft.com/office/powerpoint/2012/main"/>
+    </p:ext>
+  </p:extLst>
 </p:presentation>
 </file>
 
@@ -192,7 +197,7 @@
           <a:p>
             <a:fld id="{0E11D9DC-3FEE-4F11-AD35-CEE651F1B297}" type="datetimeFigureOut">
               <a:rPr lang="ko-KR" altLang="en-US" smtClean="0"/>
-              <a:t>2025-01-06</a:t>
+              <a:t>2025-01-10</a:t>
             </a:fld>
             <a:endParaRPr lang="ko-KR" altLang="en-US"/>
           </a:p>
@@ -690,7 +695,7 @@
           <a:p>
             <a:fld id="{13651A68-54C1-4BB0-BC22-A8C6FFFA29CD}" type="datetimeFigureOut">
               <a:rPr lang="ko-KR" altLang="en-US" smtClean="0"/>
-              <a:t>2025-01-06</a:t>
+              <a:t>2025-01-10</a:t>
             </a:fld>
             <a:endParaRPr lang="ko-KR" altLang="en-US"/>
           </a:p>
@@ -888,7 +893,7 @@
           <a:p>
             <a:fld id="{13651A68-54C1-4BB0-BC22-A8C6FFFA29CD}" type="datetimeFigureOut">
               <a:rPr lang="ko-KR" altLang="en-US" smtClean="0"/>
-              <a:t>2025-01-06</a:t>
+              <a:t>2025-01-10</a:t>
             </a:fld>
             <a:endParaRPr lang="ko-KR" altLang="en-US"/>
           </a:p>
@@ -1096,7 +1101,7 @@
           <a:p>
             <a:fld id="{13651A68-54C1-4BB0-BC22-A8C6FFFA29CD}" type="datetimeFigureOut">
               <a:rPr lang="ko-KR" altLang="en-US" smtClean="0"/>
-              <a:t>2025-01-06</a:t>
+              <a:t>2025-01-10</a:t>
             </a:fld>
             <a:endParaRPr lang="ko-KR" altLang="en-US"/>
           </a:p>
@@ -1294,7 +1299,7 @@
           <a:p>
             <a:fld id="{13651A68-54C1-4BB0-BC22-A8C6FFFA29CD}" type="datetimeFigureOut">
               <a:rPr lang="ko-KR" altLang="en-US" smtClean="0"/>
-              <a:t>2025-01-06</a:t>
+              <a:t>2025-01-10</a:t>
             </a:fld>
             <a:endParaRPr lang="ko-KR" altLang="en-US"/>
           </a:p>
@@ -1569,7 +1574,7 @@
           <a:p>
             <a:fld id="{13651A68-54C1-4BB0-BC22-A8C6FFFA29CD}" type="datetimeFigureOut">
               <a:rPr lang="ko-KR" altLang="en-US" smtClean="0"/>
-              <a:t>2025-01-06</a:t>
+              <a:t>2025-01-10</a:t>
             </a:fld>
             <a:endParaRPr lang="ko-KR" altLang="en-US"/>
           </a:p>
@@ -1834,7 +1839,7 @@
           <a:p>
             <a:fld id="{13651A68-54C1-4BB0-BC22-A8C6FFFA29CD}" type="datetimeFigureOut">
               <a:rPr lang="ko-KR" altLang="en-US" smtClean="0"/>
-              <a:t>2025-01-06</a:t>
+              <a:t>2025-01-10</a:t>
             </a:fld>
             <a:endParaRPr lang="ko-KR" altLang="en-US"/>
           </a:p>
@@ -2246,7 +2251,7 @@
           <a:p>
             <a:fld id="{13651A68-54C1-4BB0-BC22-A8C6FFFA29CD}" type="datetimeFigureOut">
               <a:rPr lang="ko-KR" altLang="en-US" smtClean="0"/>
-              <a:t>2025-01-06</a:t>
+              <a:t>2025-01-10</a:t>
             </a:fld>
             <a:endParaRPr lang="ko-KR" altLang="en-US"/>
           </a:p>
@@ -2387,7 +2392,7 @@
           <a:p>
             <a:fld id="{13651A68-54C1-4BB0-BC22-A8C6FFFA29CD}" type="datetimeFigureOut">
               <a:rPr lang="ko-KR" altLang="en-US" smtClean="0"/>
-              <a:t>2025-01-06</a:t>
+              <a:t>2025-01-10</a:t>
             </a:fld>
             <a:endParaRPr lang="ko-KR" altLang="en-US"/>
           </a:p>
@@ -2500,7 +2505,7 @@
           <a:p>
             <a:fld id="{13651A68-54C1-4BB0-BC22-A8C6FFFA29CD}" type="datetimeFigureOut">
               <a:rPr lang="ko-KR" altLang="en-US" smtClean="0"/>
-              <a:t>2025-01-06</a:t>
+              <a:t>2025-01-10</a:t>
             </a:fld>
             <a:endParaRPr lang="ko-KR" altLang="en-US"/>
           </a:p>
@@ -2811,7 +2816,7 @@
           <a:p>
             <a:fld id="{13651A68-54C1-4BB0-BC22-A8C6FFFA29CD}" type="datetimeFigureOut">
               <a:rPr lang="ko-KR" altLang="en-US" smtClean="0"/>
-              <a:t>2025-01-06</a:t>
+              <a:t>2025-01-10</a:t>
             </a:fld>
             <a:endParaRPr lang="ko-KR" altLang="en-US"/>
           </a:p>
@@ -3099,7 +3104,7 @@
           <a:p>
             <a:fld id="{13651A68-54C1-4BB0-BC22-A8C6FFFA29CD}" type="datetimeFigureOut">
               <a:rPr lang="ko-KR" altLang="en-US" smtClean="0"/>
-              <a:t>2025-01-06</a:t>
+              <a:t>2025-01-10</a:t>
             </a:fld>
             <a:endParaRPr lang="ko-KR" altLang="en-US"/>
           </a:p>
@@ -3340,7 +3345,7 @@
           <a:p>
             <a:fld id="{13651A68-54C1-4BB0-BC22-A8C6FFFA29CD}" type="datetimeFigureOut">
               <a:rPr lang="ko-KR" altLang="en-US" smtClean="0"/>
-              <a:t>2025-01-06</a:t>
+              <a:t>2025-01-10</a:t>
             </a:fld>
             <a:endParaRPr lang="ko-KR" altLang="en-US"/>
           </a:p>
@@ -7268,6 +7273,2752 @@
           </a:p>
           <a:p>
             <a:endParaRPr lang="ko-KR" altLang="en-US" sz="8800" b="1" dirty="0"/>
+          </a:p>
+        </p:txBody>
+      </p:sp>
+      <p:sp>
+        <p:nvSpPr>
+          <p:cNvPr id="2" name="타원 1">
+            <a:extLst>
+              <a:ext uri="{FF2B5EF4-FFF2-40B4-BE49-F238E27FC236}">
+                <a16:creationId xmlns:a16="http://schemas.microsoft.com/office/drawing/2014/main" id="{39A50D19-8114-FB5E-55EF-A07FDD2227B1}"/>
+              </a:ext>
+            </a:extLst>
+          </p:cNvPr>
+          <p:cNvSpPr/>
+          <p:nvPr/>
+        </p:nvSpPr>
+        <p:spPr>
+          <a:xfrm>
+            <a:off x="7392077" y="158881"/>
+            <a:ext cx="341938" cy="353801"/>
+          </a:xfrm>
+          <a:prstGeom prst="ellipse">
+            <a:avLst/>
+          </a:prstGeom>
+          <a:solidFill>
+            <a:srgbClr val="FFFF00"/>
+          </a:solidFill>
+        </p:spPr>
+        <p:style>
+          <a:lnRef idx="2">
+            <a:schemeClr val="accent1">
+              <a:shade val="15000"/>
+            </a:schemeClr>
+          </a:lnRef>
+          <a:fillRef idx="1">
+            <a:schemeClr val="accent1"/>
+          </a:fillRef>
+          <a:effectRef idx="0">
+            <a:schemeClr val="accent1"/>
+          </a:effectRef>
+          <a:fontRef idx="minor">
+            <a:schemeClr val="lt1"/>
+          </a:fontRef>
+        </p:style>
+        <p:txBody>
+          <a:bodyPr rtlCol="0" anchor="ctr"/>
+          <a:lstStyle/>
+          <a:p>
+            <a:pPr algn="ctr"/>
+            <a:r>
+              <a:rPr lang="en-US" altLang="ko-KR" sz="1400" dirty="0">
+                <a:solidFill>
+                  <a:schemeClr val="tx1"/>
+                </a:solidFill>
+              </a:rPr>
+              <a:t>F</a:t>
+            </a:r>
+            <a:endParaRPr lang="ko-KR" altLang="en-US" dirty="0">
+              <a:solidFill>
+                <a:schemeClr val="tx1"/>
+              </a:solidFill>
+            </a:endParaRPr>
+          </a:p>
+        </p:txBody>
+      </p:sp>
+      <p:sp>
+        <p:nvSpPr>
+          <p:cNvPr id="3" name="타원 2">
+            <a:extLst>
+              <a:ext uri="{FF2B5EF4-FFF2-40B4-BE49-F238E27FC236}">
+                <a16:creationId xmlns:a16="http://schemas.microsoft.com/office/drawing/2014/main" id="{DC821E21-12C0-0FED-E59B-D39747B7D4E1}"/>
+              </a:ext>
+            </a:extLst>
+          </p:cNvPr>
+          <p:cNvSpPr/>
+          <p:nvPr/>
+        </p:nvSpPr>
+        <p:spPr>
+          <a:xfrm>
+            <a:off x="11231986" y="-3385254"/>
+            <a:ext cx="341938" cy="353801"/>
+          </a:xfrm>
+          <a:prstGeom prst="ellipse">
+            <a:avLst/>
+          </a:prstGeom>
+          <a:solidFill>
+            <a:srgbClr val="FFFF00"/>
+          </a:solidFill>
+        </p:spPr>
+        <p:style>
+          <a:lnRef idx="2">
+            <a:schemeClr val="accent1">
+              <a:shade val="15000"/>
+            </a:schemeClr>
+          </a:lnRef>
+          <a:fillRef idx="1">
+            <a:schemeClr val="accent1"/>
+          </a:fillRef>
+          <a:effectRef idx="0">
+            <a:schemeClr val="accent1"/>
+          </a:effectRef>
+          <a:fontRef idx="minor">
+            <a:schemeClr val="lt1"/>
+          </a:fontRef>
+        </p:style>
+        <p:txBody>
+          <a:bodyPr rtlCol="0" anchor="ctr"/>
+          <a:lstStyle/>
+          <a:p>
+            <a:pPr algn="ctr"/>
+            <a:r>
+              <a:rPr lang="en-US" altLang="ko-KR" sz="1400" dirty="0">
+                <a:solidFill>
+                  <a:schemeClr val="tx1"/>
+                </a:solidFill>
+              </a:rPr>
+              <a:t>H</a:t>
+            </a:r>
+            <a:endParaRPr lang="ko-KR" altLang="en-US" dirty="0">
+              <a:solidFill>
+                <a:schemeClr val="tx1"/>
+              </a:solidFill>
+            </a:endParaRPr>
+          </a:p>
+        </p:txBody>
+      </p:sp>
+      <p:sp>
+        <p:nvSpPr>
+          <p:cNvPr id="5" name="타원 4">
+            <a:extLst>
+              <a:ext uri="{FF2B5EF4-FFF2-40B4-BE49-F238E27FC236}">
+                <a16:creationId xmlns:a16="http://schemas.microsoft.com/office/drawing/2014/main" id="{8FBD0E50-81DF-AE76-CAD6-D4486C3CBBD9}"/>
+              </a:ext>
+            </a:extLst>
+          </p:cNvPr>
+          <p:cNvSpPr/>
+          <p:nvPr/>
+        </p:nvSpPr>
+        <p:spPr>
+          <a:xfrm>
+            <a:off x="9742288" y="-1353444"/>
+            <a:ext cx="341938" cy="353801"/>
+          </a:xfrm>
+          <a:prstGeom prst="ellipse">
+            <a:avLst/>
+          </a:prstGeom>
+          <a:solidFill>
+            <a:srgbClr val="FFC000"/>
+          </a:solidFill>
+        </p:spPr>
+        <p:style>
+          <a:lnRef idx="2">
+            <a:schemeClr val="accent1">
+              <a:shade val="15000"/>
+            </a:schemeClr>
+          </a:lnRef>
+          <a:fillRef idx="1">
+            <a:schemeClr val="accent1"/>
+          </a:fillRef>
+          <a:effectRef idx="0">
+            <a:schemeClr val="accent1"/>
+          </a:effectRef>
+          <a:fontRef idx="minor">
+            <a:schemeClr val="lt1"/>
+          </a:fontRef>
+        </p:style>
+        <p:txBody>
+          <a:bodyPr rtlCol="0" anchor="ctr"/>
+          <a:lstStyle/>
+          <a:p>
+            <a:pPr algn="ctr"/>
+            <a:r>
+              <a:rPr lang="en-US" altLang="ko-KR" sz="1400" dirty="0">
+                <a:solidFill>
+                  <a:schemeClr val="tx1"/>
+                </a:solidFill>
+              </a:rPr>
+              <a:t>G</a:t>
+            </a:r>
+            <a:endParaRPr lang="ko-KR" altLang="en-US" dirty="0">
+              <a:solidFill>
+                <a:schemeClr val="tx1"/>
+              </a:solidFill>
+            </a:endParaRPr>
+          </a:p>
+        </p:txBody>
+      </p:sp>
+      <p:sp>
+        <p:nvSpPr>
+          <p:cNvPr id="7" name="타원 6">
+            <a:extLst>
+              <a:ext uri="{FF2B5EF4-FFF2-40B4-BE49-F238E27FC236}">
+                <a16:creationId xmlns:a16="http://schemas.microsoft.com/office/drawing/2014/main" id="{B1E2AD43-8AC5-42FE-823C-B2075E384DAB}"/>
+              </a:ext>
+            </a:extLst>
+          </p:cNvPr>
+          <p:cNvSpPr/>
+          <p:nvPr/>
+        </p:nvSpPr>
+        <p:spPr>
+          <a:xfrm>
+            <a:off x="11231986" y="-1931754"/>
+            <a:ext cx="341938" cy="353801"/>
+          </a:xfrm>
+          <a:prstGeom prst="ellipse">
+            <a:avLst/>
+          </a:prstGeom>
+          <a:solidFill>
+            <a:srgbClr val="FFFF00"/>
+          </a:solidFill>
+        </p:spPr>
+        <p:style>
+          <a:lnRef idx="2">
+            <a:schemeClr val="accent1">
+              <a:shade val="15000"/>
+            </a:schemeClr>
+          </a:lnRef>
+          <a:fillRef idx="1">
+            <a:schemeClr val="accent1"/>
+          </a:fillRef>
+          <a:effectRef idx="0">
+            <a:schemeClr val="accent1"/>
+          </a:effectRef>
+          <a:fontRef idx="minor">
+            <a:schemeClr val="lt1"/>
+          </a:fontRef>
+        </p:style>
+        <p:txBody>
+          <a:bodyPr rtlCol="0" anchor="ctr"/>
+          <a:lstStyle/>
+          <a:p>
+            <a:pPr algn="ctr"/>
+            <a:r>
+              <a:rPr lang="en-US" altLang="ko-KR" sz="1400" dirty="0">
+                <a:solidFill>
+                  <a:schemeClr val="tx1"/>
+                </a:solidFill>
+              </a:rPr>
+              <a:t>J</a:t>
+            </a:r>
+            <a:endParaRPr lang="ko-KR" altLang="en-US" dirty="0">
+              <a:solidFill>
+                <a:schemeClr val="tx1"/>
+              </a:solidFill>
+            </a:endParaRPr>
+          </a:p>
+        </p:txBody>
+      </p:sp>
+      <p:sp>
+        <p:nvSpPr>
+          <p:cNvPr id="32" name="타원 31">
+            <a:extLst>
+              <a:ext uri="{FF2B5EF4-FFF2-40B4-BE49-F238E27FC236}">
+                <a16:creationId xmlns:a16="http://schemas.microsoft.com/office/drawing/2014/main" id="{F99B790A-766F-A7F5-79B8-F08E26327FD9}"/>
+              </a:ext>
+            </a:extLst>
+          </p:cNvPr>
+          <p:cNvSpPr/>
+          <p:nvPr/>
+        </p:nvSpPr>
+        <p:spPr>
+          <a:xfrm>
+            <a:off x="12639981" y="-2519368"/>
+            <a:ext cx="341938" cy="353801"/>
+          </a:xfrm>
+          <a:prstGeom prst="ellipse">
+            <a:avLst/>
+          </a:prstGeom>
+          <a:solidFill>
+            <a:srgbClr val="FFFF00"/>
+          </a:solidFill>
+        </p:spPr>
+        <p:style>
+          <a:lnRef idx="2">
+            <a:schemeClr val="accent1">
+              <a:shade val="15000"/>
+            </a:schemeClr>
+          </a:lnRef>
+          <a:fillRef idx="1">
+            <a:schemeClr val="accent1"/>
+          </a:fillRef>
+          <a:effectRef idx="0">
+            <a:schemeClr val="accent1"/>
+          </a:effectRef>
+          <a:fontRef idx="minor">
+            <a:schemeClr val="lt1"/>
+          </a:fontRef>
+        </p:style>
+        <p:txBody>
+          <a:bodyPr rtlCol="0" anchor="ctr"/>
+          <a:lstStyle/>
+          <a:p>
+            <a:pPr algn="ctr"/>
+            <a:r>
+              <a:rPr lang="en-US" altLang="ko-KR" sz="1400" dirty="0">
+                <a:solidFill>
+                  <a:schemeClr val="tx1"/>
+                </a:solidFill>
+              </a:rPr>
+              <a:t>K</a:t>
+            </a:r>
+            <a:endParaRPr lang="ko-KR" altLang="en-US" dirty="0">
+              <a:solidFill>
+                <a:schemeClr val="tx1"/>
+              </a:solidFill>
+            </a:endParaRPr>
+          </a:p>
+        </p:txBody>
+      </p:sp>
+      <p:sp>
+        <p:nvSpPr>
+          <p:cNvPr id="36" name="타원 35">
+            <a:extLst>
+              <a:ext uri="{FF2B5EF4-FFF2-40B4-BE49-F238E27FC236}">
+                <a16:creationId xmlns:a16="http://schemas.microsoft.com/office/drawing/2014/main" id="{2BBE8C3A-AEEF-11AD-CFCB-C953FE6778DA}"/>
+              </a:ext>
+            </a:extLst>
+          </p:cNvPr>
+          <p:cNvSpPr/>
+          <p:nvPr/>
+        </p:nvSpPr>
+        <p:spPr>
+          <a:xfrm>
+            <a:off x="12981919" y="-3888937"/>
+            <a:ext cx="341938" cy="353801"/>
+          </a:xfrm>
+          <a:prstGeom prst="ellipse">
+            <a:avLst/>
+          </a:prstGeom>
+          <a:solidFill>
+            <a:srgbClr val="FFFF00"/>
+          </a:solidFill>
+        </p:spPr>
+        <p:style>
+          <a:lnRef idx="2">
+            <a:schemeClr val="accent1">
+              <a:shade val="15000"/>
+            </a:schemeClr>
+          </a:lnRef>
+          <a:fillRef idx="1">
+            <a:schemeClr val="accent1"/>
+          </a:fillRef>
+          <a:effectRef idx="0">
+            <a:schemeClr val="accent1"/>
+          </a:effectRef>
+          <a:fontRef idx="minor">
+            <a:schemeClr val="lt1"/>
+          </a:fontRef>
+        </p:style>
+        <p:txBody>
+          <a:bodyPr rtlCol="0" anchor="ctr"/>
+          <a:lstStyle/>
+          <a:p>
+            <a:pPr algn="ctr"/>
+            <a:r>
+              <a:rPr lang="en-US" altLang="ko-KR" sz="1400" dirty="0">
+                <a:solidFill>
+                  <a:schemeClr val="tx1"/>
+                </a:solidFill>
+              </a:rPr>
+              <a:t>I</a:t>
+            </a:r>
+            <a:endParaRPr lang="ko-KR" altLang="en-US" dirty="0">
+              <a:solidFill>
+                <a:schemeClr val="tx1"/>
+              </a:solidFill>
+            </a:endParaRPr>
+          </a:p>
+        </p:txBody>
+      </p:sp>
+      <p:sp>
+        <p:nvSpPr>
+          <p:cNvPr id="44" name="타원 43">
+            <a:extLst>
+              <a:ext uri="{FF2B5EF4-FFF2-40B4-BE49-F238E27FC236}">
+                <a16:creationId xmlns:a16="http://schemas.microsoft.com/office/drawing/2014/main" id="{FAC138AC-14F2-2F4B-9429-67C027F99B02}"/>
+              </a:ext>
+            </a:extLst>
+          </p:cNvPr>
+          <p:cNvSpPr/>
+          <p:nvPr/>
+        </p:nvSpPr>
+        <p:spPr>
+          <a:xfrm>
+            <a:off x="6020322" y="-2691935"/>
+            <a:ext cx="341938" cy="353801"/>
+          </a:xfrm>
+          <a:prstGeom prst="ellipse">
+            <a:avLst/>
+          </a:prstGeom>
+          <a:solidFill>
+            <a:schemeClr val="accent4">
+              <a:lumMod val="40000"/>
+              <a:lumOff val="60000"/>
+            </a:schemeClr>
+          </a:solidFill>
+        </p:spPr>
+        <p:style>
+          <a:lnRef idx="2">
+            <a:schemeClr val="accent1">
+              <a:shade val="15000"/>
+            </a:schemeClr>
+          </a:lnRef>
+          <a:fillRef idx="1">
+            <a:schemeClr val="accent1"/>
+          </a:fillRef>
+          <a:effectRef idx="0">
+            <a:schemeClr val="accent1"/>
+          </a:effectRef>
+          <a:fontRef idx="minor">
+            <a:schemeClr val="lt1"/>
+          </a:fontRef>
+        </p:style>
+        <p:txBody>
+          <a:bodyPr rtlCol="0" anchor="ctr"/>
+          <a:lstStyle/>
+          <a:p>
+            <a:pPr algn="ctr"/>
+            <a:r>
+              <a:rPr lang="ko-KR" altLang="en-US" sz="1400" dirty="0">
+                <a:solidFill>
+                  <a:schemeClr val="tx1"/>
+                </a:solidFill>
+              </a:rPr>
+              <a:t>ㄱ</a:t>
+            </a:r>
+            <a:endParaRPr lang="ko-KR" altLang="en-US" dirty="0">
+              <a:solidFill>
+                <a:schemeClr val="tx1"/>
+              </a:solidFill>
+            </a:endParaRPr>
+          </a:p>
+        </p:txBody>
+      </p:sp>
+      <p:sp>
+        <p:nvSpPr>
+          <p:cNvPr id="45" name="타원 44">
+            <a:extLst>
+              <a:ext uri="{FF2B5EF4-FFF2-40B4-BE49-F238E27FC236}">
+                <a16:creationId xmlns:a16="http://schemas.microsoft.com/office/drawing/2014/main" id="{A9F18B96-383D-941C-169C-C259385D5606}"/>
+              </a:ext>
+            </a:extLst>
+          </p:cNvPr>
+          <p:cNvSpPr/>
+          <p:nvPr/>
+        </p:nvSpPr>
+        <p:spPr>
+          <a:xfrm>
+            <a:off x="-893368" y="-97617"/>
+            <a:ext cx="341938" cy="353801"/>
+          </a:xfrm>
+          <a:prstGeom prst="ellipse">
+            <a:avLst/>
+          </a:prstGeom>
+          <a:solidFill>
+            <a:schemeClr val="accent4">
+              <a:lumMod val="40000"/>
+              <a:lumOff val="60000"/>
+            </a:schemeClr>
+          </a:solidFill>
+        </p:spPr>
+        <p:style>
+          <a:lnRef idx="2">
+            <a:schemeClr val="accent1">
+              <a:shade val="15000"/>
+            </a:schemeClr>
+          </a:lnRef>
+          <a:fillRef idx="1">
+            <a:schemeClr val="accent1"/>
+          </a:fillRef>
+          <a:effectRef idx="0">
+            <a:schemeClr val="accent1"/>
+          </a:effectRef>
+          <a:fontRef idx="minor">
+            <a:schemeClr val="lt1"/>
+          </a:fontRef>
+        </p:style>
+        <p:txBody>
+          <a:bodyPr rtlCol="0" anchor="ctr"/>
+          <a:lstStyle/>
+          <a:p>
+            <a:pPr algn="ctr"/>
+            <a:r>
+              <a:rPr lang="ko-KR" altLang="en-US" sz="1400" dirty="0">
+                <a:solidFill>
+                  <a:schemeClr val="tx1"/>
+                </a:solidFill>
+              </a:rPr>
+              <a:t>ㄴ</a:t>
+            </a:r>
+            <a:endParaRPr lang="ko-KR" altLang="en-US" dirty="0">
+              <a:solidFill>
+                <a:schemeClr val="tx1"/>
+              </a:solidFill>
+            </a:endParaRPr>
+          </a:p>
+        </p:txBody>
+      </p:sp>
+      <p:sp>
+        <p:nvSpPr>
+          <p:cNvPr id="47" name="타원 46">
+            <a:extLst>
+              <a:ext uri="{FF2B5EF4-FFF2-40B4-BE49-F238E27FC236}">
+                <a16:creationId xmlns:a16="http://schemas.microsoft.com/office/drawing/2014/main" id="{05590292-402B-1504-D7AF-A1CD11D6EA10}"/>
+              </a:ext>
+            </a:extLst>
+          </p:cNvPr>
+          <p:cNvSpPr/>
+          <p:nvPr/>
+        </p:nvSpPr>
+        <p:spPr>
+          <a:xfrm>
+            <a:off x="12144068" y="-8015614"/>
+            <a:ext cx="341938" cy="353801"/>
+          </a:xfrm>
+          <a:prstGeom prst="ellipse">
+            <a:avLst/>
+          </a:prstGeom>
+          <a:solidFill>
+            <a:schemeClr val="accent4">
+              <a:lumMod val="40000"/>
+              <a:lumOff val="60000"/>
+            </a:schemeClr>
+          </a:solidFill>
+        </p:spPr>
+        <p:style>
+          <a:lnRef idx="2">
+            <a:schemeClr val="accent1">
+              <a:shade val="15000"/>
+            </a:schemeClr>
+          </a:lnRef>
+          <a:fillRef idx="1">
+            <a:schemeClr val="accent1"/>
+          </a:fillRef>
+          <a:effectRef idx="0">
+            <a:schemeClr val="accent1"/>
+          </a:effectRef>
+          <a:fontRef idx="minor">
+            <a:schemeClr val="lt1"/>
+          </a:fontRef>
+        </p:style>
+        <p:txBody>
+          <a:bodyPr rtlCol="0" anchor="ctr"/>
+          <a:lstStyle/>
+          <a:p>
+            <a:pPr algn="ctr"/>
+            <a:r>
+              <a:rPr lang="ko-KR" altLang="en-US" sz="1400" dirty="0">
+                <a:solidFill>
+                  <a:schemeClr val="tx1"/>
+                </a:solidFill>
+              </a:rPr>
+              <a:t>ㄷ</a:t>
+            </a:r>
+            <a:endParaRPr lang="ko-KR" altLang="en-US" dirty="0">
+              <a:solidFill>
+                <a:schemeClr val="tx1"/>
+              </a:solidFill>
+            </a:endParaRPr>
+          </a:p>
+        </p:txBody>
+      </p:sp>
+      <p:sp>
+        <p:nvSpPr>
+          <p:cNvPr id="48" name="타원 47">
+            <a:extLst>
+              <a:ext uri="{FF2B5EF4-FFF2-40B4-BE49-F238E27FC236}">
+                <a16:creationId xmlns:a16="http://schemas.microsoft.com/office/drawing/2014/main" id="{2F849D0E-C86D-8FC0-55D1-777B6E548987}"/>
+              </a:ext>
+            </a:extLst>
+          </p:cNvPr>
+          <p:cNvSpPr/>
+          <p:nvPr/>
+        </p:nvSpPr>
+        <p:spPr>
+          <a:xfrm>
+            <a:off x="22038613" y="5620649"/>
+            <a:ext cx="341938" cy="353801"/>
+          </a:xfrm>
+          <a:prstGeom prst="ellipse">
+            <a:avLst/>
+          </a:prstGeom>
+          <a:solidFill>
+            <a:schemeClr val="accent4">
+              <a:lumMod val="40000"/>
+              <a:lumOff val="60000"/>
+            </a:schemeClr>
+          </a:solidFill>
+        </p:spPr>
+        <p:style>
+          <a:lnRef idx="2">
+            <a:schemeClr val="accent1">
+              <a:shade val="15000"/>
+            </a:schemeClr>
+          </a:lnRef>
+          <a:fillRef idx="1">
+            <a:schemeClr val="accent1"/>
+          </a:fillRef>
+          <a:effectRef idx="0">
+            <a:schemeClr val="accent1"/>
+          </a:effectRef>
+          <a:fontRef idx="minor">
+            <a:schemeClr val="lt1"/>
+          </a:fontRef>
+        </p:style>
+        <p:txBody>
+          <a:bodyPr rtlCol="0" anchor="ctr"/>
+          <a:lstStyle/>
+          <a:p>
+            <a:pPr algn="ctr"/>
+            <a:r>
+              <a:rPr lang="ko-KR" altLang="en-US" sz="1400" dirty="0">
+                <a:solidFill>
+                  <a:schemeClr val="tx1"/>
+                </a:solidFill>
+              </a:rPr>
+              <a:t>ㄹ</a:t>
+            </a:r>
+            <a:endParaRPr lang="ko-KR" altLang="en-US" dirty="0">
+              <a:solidFill>
+                <a:schemeClr val="tx1"/>
+              </a:solidFill>
+            </a:endParaRPr>
+          </a:p>
+        </p:txBody>
+      </p:sp>
+      <p:sp>
+        <p:nvSpPr>
+          <p:cNvPr id="49" name="타원 48">
+            <a:extLst>
+              <a:ext uri="{FF2B5EF4-FFF2-40B4-BE49-F238E27FC236}">
+                <a16:creationId xmlns:a16="http://schemas.microsoft.com/office/drawing/2014/main" id="{45E245B4-9840-2036-7879-58CF99841C60}"/>
+              </a:ext>
+            </a:extLst>
+          </p:cNvPr>
+          <p:cNvSpPr/>
+          <p:nvPr/>
+        </p:nvSpPr>
+        <p:spPr>
+          <a:xfrm>
+            <a:off x="32263496" y="2530017"/>
+            <a:ext cx="341938" cy="353801"/>
+          </a:xfrm>
+          <a:prstGeom prst="ellipse">
+            <a:avLst/>
+          </a:prstGeom>
+          <a:solidFill>
+            <a:schemeClr val="accent4">
+              <a:lumMod val="40000"/>
+              <a:lumOff val="60000"/>
+            </a:schemeClr>
+          </a:solidFill>
+        </p:spPr>
+        <p:style>
+          <a:lnRef idx="2">
+            <a:schemeClr val="accent1">
+              <a:shade val="15000"/>
+            </a:schemeClr>
+          </a:lnRef>
+          <a:fillRef idx="1">
+            <a:schemeClr val="accent1"/>
+          </a:fillRef>
+          <a:effectRef idx="0">
+            <a:schemeClr val="accent1"/>
+          </a:effectRef>
+          <a:fontRef idx="minor">
+            <a:schemeClr val="lt1"/>
+          </a:fontRef>
+        </p:style>
+        <p:txBody>
+          <a:bodyPr rtlCol="0" anchor="ctr"/>
+          <a:lstStyle/>
+          <a:p>
+            <a:pPr algn="ctr"/>
+            <a:r>
+              <a:rPr lang="ko-KR" altLang="en-US" sz="1400" dirty="0">
+                <a:solidFill>
+                  <a:schemeClr val="tx1"/>
+                </a:solidFill>
+              </a:rPr>
+              <a:t>ㅁ</a:t>
+            </a:r>
+            <a:endParaRPr lang="ko-KR" altLang="en-US" dirty="0">
+              <a:solidFill>
+                <a:schemeClr val="tx1"/>
+              </a:solidFill>
+            </a:endParaRPr>
+          </a:p>
+        </p:txBody>
+      </p:sp>
+      <p:sp>
+        <p:nvSpPr>
+          <p:cNvPr id="58" name="타원 57">
+            <a:extLst>
+              <a:ext uri="{FF2B5EF4-FFF2-40B4-BE49-F238E27FC236}">
+                <a16:creationId xmlns:a16="http://schemas.microsoft.com/office/drawing/2014/main" id="{AD0AFD50-9C67-8E78-DC78-DCBBFDE1D33B}"/>
+              </a:ext>
+            </a:extLst>
+          </p:cNvPr>
+          <p:cNvSpPr/>
+          <p:nvPr/>
+        </p:nvSpPr>
+        <p:spPr>
+          <a:xfrm>
+            <a:off x="10602421" y="3291514"/>
+            <a:ext cx="341938" cy="353801"/>
+          </a:xfrm>
+          <a:prstGeom prst="ellipse">
+            <a:avLst/>
+          </a:prstGeom>
+          <a:solidFill>
+            <a:srgbClr val="FFFF00"/>
+          </a:solidFill>
+        </p:spPr>
+        <p:style>
+          <a:lnRef idx="2">
+            <a:schemeClr val="accent1">
+              <a:shade val="15000"/>
+            </a:schemeClr>
+          </a:lnRef>
+          <a:fillRef idx="1">
+            <a:schemeClr val="accent1"/>
+          </a:fillRef>
+          <a:effectRef idx="0">
+            <a:schemeClr val="accent1"/>
+          </a:effectRef>
+          <a:fontRef idx="minor">
+            <a:schemeClr val="lt1"/>
+          </a:fontRef>
+        </p:style>
+        <p:txBody>
+          <a:bodyPr rtlCol="0" anchor="ctr"/>
+          <a:lstStyle/>
+          <a:p>
+            <a:pPr algn="ctr"/>
+            <a:r>
+              <a:rPr lang="en-US" altLang="ko-KR" sz="1400" dirty="0">
+                <a:solidFill>
+                  <a:schemeClr val="tx1"/>
+                </a:solidFill>
+              </a:rPr>
+              <a:t>P</a:t>
+            </a:r>
+            <a:endParaRPr lang="ko-KR" altLang="en-US" dirty="0">
+              <a:solidFill>
+                <a:schemeClr val="tx1"/>
+              </a:solidFill>
+            </a:endParaRPr>
+          </a:p>
+        </p:txBody>
+      </p:sp>
+      <p:sp>
+        <p:nvSpPr>
+          <p:cNvPr id="72" name="타원 71">
+            <a:extLst>
+              <a:ext uri="{FF2B5EF4-FFF2-40B4-BE49-F238E27FC236}">
+                <a16:creationId xmlns:a16="http://schemas.microsoft.com/office/drawing/2014/main" id="{16FDBC45-E0F9-B3A3-D38F-3D44C0D85428}"/>
+              </a:ext>
+            </a:extLst>
+          </p:cNvPr>
+          <p:cNvSpPr/>
+          <p:nvPr/>
+        </p:nvSpPr>
+        <p:spPr>
+          <a:xfrm>
+            <a:off x="11345507" y="2435666"/>
+            <a:ext cx="341938" cy="353801"/>
+          </a:xfrm>
+          <a:prstGeom prst="ellipse">
+            <a:avLst/>
+          </a:prstGeom>
+          <a:solidFill>
+            <a:srgbClr val="FFFF00"/>
+          </a:solidFill>
+        </p:spPr>
+        <p:style>
+          <a:lnRef idx="2">
+            <a:schemeClr val="accent1">
+              <a:shade val="15000"/>
+            </a:schemeClr>
+          </a:lnRef>
+          <a:fillRef idx="1">
+            <a:schemeClr val="accent1"/>
+          </a:fillRef>
+          <a:effectRef idx="0">
+            <a:schemeClr val="accent1"/>
+          </a:effectRef>
+          <a:fontRef idx="minor">
+            <a:schemeClr val="lt1"/>
+          </a:fontRef>
+        </p:style>
+        <p:txBody>
+          <a:bodyPr rtlCol="0" anchor="ctr"/>
+          <a:lstStyle/>
+          <a:p>
+            <a:pPr algn="ctr"/>
+            <a:r>
+              <a:rPr lang="en-US" altLang="ko-KR" sz="1400" dirty="0">
+                <a:solidFill>
+                  <a:schemeClr val="tx1"/>
+                </a:solidFill>
+              </a:rPr>
+              <a:t>Q</a:t>
+            </a:r>
+            <a:endParaRPr lang="ko-KR" altLang="en-US" dirty="0">
+              <a:solidFill>
+                <a:schemeClr val="tx1"/>
+              </a:solidFill>
+            </a:endParaRPr>
+          </a:p>
+        </p:txBody>
+      </p:sp>
+      <p:sp>
+        <p:nvSpPr>
+          <p:cNvPr id="73" name="타원 72">
+            <a:extLst>
+              <a:ext uri="{FF2B5EF4-FFF2-40B4-BE49-F238E27FC236}">
+                <a16:creationId xmlns:a16="http://schemas.microsoft.com/office/drawing/2014/main" id="{5A9E81DF-FF2E-6E9E-8542-D137E78A8A1E}"/>
+              </a:ext>
+            </a:extLst>
+          </p:cNvPr>
+          <p:cNvSpPr/>
+          <p:nvPr/>
+        </p:nvSpPr>
+        <p:spPr>
+          <a:xfrm>
+            <a:off x="9709890" y="2645695"/>
+            <a:ext cx="341938" cy="353801"/>
+          </a:xfrm>
+          <a:prstGeom prst="ellipse">
+            <a:avLst/>
+          </a:prstGeom>
+          <a:solidFill>
+            <a:srgbClr val="FFFF00"/>
+          </a:solidFill>
+        </p:spPr>
+        <p:style>
+          <a:lnRef idx="2">
+            <a:schemeClr val="accent1">
+              <a:shade val="15000"/>
+            </a:schemeClr>
+          </a:lnRef>
+          <a:fillRef idx="1">
+            <a:schemeClr val="accent1"/>
+          </a:fillRef>
+          <a:effectRef idx="0">
+            <a:schemeClr val="accent1"/>
+          </a:effectRef>
+          <a:fontRef idx="minor">
+            <a:schemeClr val="lt1"/>
+          </a:fontRef>
+        </p:style>
+        <p:txBody>
+          <a:bodyPr rtlCol="0" anchor="ctr"/>
+          <a:lstStyle/>
+          <a:p>
+            <a:pPr algn="ctr"/>
+            <a:r>
+              <a:rPr lang="en-US" altLang="ko-KR" sz="1400" dirty="0">
+                <a:solidFill>
+                  <a:schemeClr val="tx1"/>
+                </a:solidFill>
+              </a:rPr>
+              <a:t>O</a:t>
+            </a:r>
+            <a:endParaRPr lang="ko-KR" altLang="en-US" dirty="0">
+              <a:solidFill>
+                <a:schemeClr val="tx1"/>
+              </a:solidFill>
+            </a:endParaRPr>
+          </a:p>
+        </p:txBody>
+      </p:sp>
+      <p:sp>
+        <p:nvSpPr>
+          <p:cNvPr id="74" name="타원 73">
+            <a:extLst>
+              <a:ext uri="{FF2B5EF4-FFF2-40B4-BE49-F238E27FC236}">
+                <a16:creationId xmlns:a16="http://schemas.microsoft.com/office/drawing/2014/main" id="{A4531A3A-8C1A-B820-9C81-4EA174996CC1}"/>
+              </a:ext>
+            </a:extLst>
+          </p:cNvPr>
+          <p:cNvSpPr/>
+          <p:nvPr/>
+        </p:nvSpPr>
+        <p:spPr>
+          <a:xfrm>
+            <a:off x="2585294" y="991291"/>
+            <a:ext cx="341938" cy="353801"/>
+          </a:xfrm>
+          <a:prstGeom prst="ellipse">
+            <a:avLst/>
+          </a:prstGeom>
+          <a:solidFill>
+            <a:srgbClr val="FFFF00"/>
+          </a:solidFill>
+        </p:spPr>
+        <p:style>
+          <a:lnRef idx="2">
+            <a:schemeClr val="accent1">
+              <a:shade val="15000"/>
+            </a:schemeClr>
+          </a:lnRef>
+          <a:fillRef idx="1">
+            <a:schemeClr val="accent1"/>
+          </a:fillRef>
+          <a:effectRef idx="0">
+            <a:schemeClr val="accent1"/>
+          </a:effectRef>
+          <a:fontRef idx="minor">
+            <a:schemeClr val="lt1"/>
+          </a:fontRef>
+        </p:style>
+        <p:txBody>
+          <a:bodyPr rtlCol="0" anchor="ctr"/>
+          <a:lstStyle/>
+          <a:p>
+            <a:pPr algn="ctr"/>
+            <a:r>
+              <a:rPr lang="en-US" altLang="ko-KR" sz="1400" dirty="0">
+                <a:solidFill>
+                  <a:schemeClr val="tx1"/>
+                </a:solidFill>
+              </a:rPr>
+              <a:t>N</a:t>
+            </a:r>
+            <a:endParaRPr lang="ko-KR" altLang="en-US" dirty="0">
+              <a:solidFill>
+                <a:schemeClr val="tx1"/>
+              </a:solidFill>
+            </a:endParaRPr>
+          </a:p>
+        </p:txBody>
+      </p:sp>
+      <p:sp>
+        <p:nvSpPr>
+          <p:cNvPr id="75" name="타원 74">
+            <a:extLst>
+              <a:ext uri="{FF2B5EF4-FFF2-40B4-BE49-F238E27FC236}">
+                <a16:creationId xmlns:a16="http://schemas.microsoft.com/office/drawing/2014/main" id="{BA3CAC1A-D104-B79D-80D4-E4CD74A09FE2}"/>
+              </a:ext>
+            </a:extLst>
+          </p:cNvPr>
+          <p:cNvSpPr/>
+          <p:nvPr/>
+        </p:nvSpPr>
+        <p:spPr>
+          <a:xfrm>
+            <a:off x="2777887" y="-2391920"/>
+            <a:ext cx="341938" cy="353801"/>
+          </a:xfrm>
+          <a:prstGeom prst="ellipse">
+            <a:avLst/>
+          </a:prstGeom>
+          <a:solidFill>
+            <a:srgbClr val="FFFF00"/>
+          </a:solidFill>
+        </p:spPr>
+        <p:style>
+          <a:lnRef idx="2">
+            <a:schemeClr val="accent1">
+              <a:shade val="15000"/>
+            </a:schemeClr>
+          </a:lnRef>
+          <a:fillRef idx="1">
+            <a:schemeClr val="accent1"/>
+          </a:fillRef>
+          <a:effectRef idx="0">
+            <a:schemeClr val="accent1"/>
+          </a:effectRef>
+          <a:fontRef idx="minor">
+            <a:schemeClr val="lt1"/>
+          </a:fontRef>
+        </p:style>
+        <p:txBody>
+          <a:bodyPr rtlCol="0" anchor="ctr"/>
+          <a:lstStyle/>
+          <a:p>
+            <a:pPr algn="ctr"/>
+            <a:r>
+              <a:rPr lang="en-US" altLang="ko-KR" sz="1400" dirty="0">
+                <a:solidFill>
+                  <a:schemeClr val="tx1"/>
+                </a:solidFill>
+              </a:rPr>
+              <a:t>M</a:t>
+            </a:r>
+            <a:endParaRPr lang="ko-KR" altLang="en-US" dirty="0">
+              <a:solidFill>
+                <a:schemeClr val="tx1"/>
+              </a:solidFill>
+            </a:endParaRPr>
+          </a:p>
+        </p:txBody>
+      </p:sp>
+      <p:sp>
+        <p:nvSpPr>
+          <p:cNvPr id="76" name="타원 75">
+            <a:extLst>
+              <a:ext uri="{FF2B5EF4-FFF2-40B4-BE49-F238E27FC236}">
+                <a16:creationId xmlns:a16="http://schemas.microsoft.com/office/drawing/2014/main" id="{CB16D00E-2CB1-2310-DC3F-144C905002C2}"/>
+              </a:ext>
+            </a:extLst>
+          </p:cNvPr>
+          <p:cNvSpPr/>
+          <p:nvPr/>
+        </p:nvSpPr>
+        <p:spPr>
+          <a:xfrm>
+            <a:off x="9162601" y="-3739055"/>
+            <a:ext cx="341938" cy="353801"/>
+          </a:xfrm>
+          <a:prstGeom prst="ellipse">
+            <a:avLst/>
+          </a:prstGeom>
+          <a:solidFill>
+            <a:srgbClr val="FFFF00"/>
+          </a:solidFill>
+        </p:spPr>
+        <p:style>
+          <a:lnRef idx="2">
+            <a:schemeClr val="accent1">
+              <a:shade val="15000"/>
+            </a:schemeClr>
+          </a:lnRef>
+          <a:fillRef idx="1">
+            <a:schemeClr val="accent1"/>
+          </a:fillRef>
+          <a:effectRef idx="0">
+            <a:schemeClr val="accent1"/>
+          </a:effectRef>
+          <a:fontRef idx="minor">
+            <a:schemeClr val="lt1"/>
+          </a:fontRef>
+        </p:style>
+        <p:txBody>
+          <a:bodyPr rtlCol="0" anchor="ctr"/>
+          <a:lstStyle/>
+          <a:p>
+            <a:pPr algn="ctr"/>
+            <a:r>
+              <a:rPr lang="en-US" altLang="ko-KR" dirty="0">
+                <a:solidFill>
+                  <a:schemeClr val="tx1"/>
+                </a:solidFill>
+              </a:rPr>
+              <a:t>L</a:t>
+            </a:r>
+            <a:endParaRPr lang="ko-KR" altLang="en-US" dirty="0">
+              <a:solidFill>
+                <a:schemeClr val="tx1"/>
+              </a:solidFill>
+            </a:endParaRPr>
+          </a:p>
+        </p:txBody>
+      </p:sp>
+      <p:sp>
+        <p:nvSpPr>
+          <p:cNvPr id="77" name="타원 76">
+            <a:extLst>
+              <a:ext uri="{FF2B5EF4-FFF2-40B4-BE49-F238E27FC236}">
+                <a16:creationId xmlns:a16="http://schemas.microsoft.com/office/drawing/2014/main" id="{09B22A46-3757-218A-62D2-AB879B0EC67C}"/>
+              </a:ext>
+            </a:extLst>
+          </p:cNvPr>
+          <p:cNvSpPr/>
+          <p:nvPr/>
+        </p:nvSpPr>
+        <p:spPr>
+          <a:xfrm>
+            <a:off x="13516193" y="3053449"/>
+            <a:ext cx="341938" cy="353801"/>
+          </a:xfrm>
+          <a:prstGeom prst="ellipse">
+            <a:avLst/>
+          </a:prstGeom>
+          <a:solidFill>
+            <a:srgbClr val="FFFF00"/>
+          </a:solidFill>
+        </p:spPr>
+        <p:style>
+          <a:lnRef idx="2">
+            <a:schemeClr val="accent1">
+              <a:shade val="15000"/>
+            </a:schemeClr>
+          </a:lnRef>
+          <a:fillRef idx="1">
+            <a:schemeClr val="accent1"/>
+          </a:fillRef>
+          <a:effectRef idx="0">
+            <a:schemeClr val="accent1"/>
+          </a:effectRef>
+          <a:fontRef idx="minor">
+            <a:schemeClr val="lt1"/>
+          </a:fontRef>
+        </p:style>
+        <p:txBody>
+          <a:bodyPr rtlCol="0" anchor="ctr"/>
+          <a:lstStyle/>
+          <a:p>
+            <a:pPr algn="ctr"/>
+            <a:r>
+              <a:rPr lang="en-US" altLang="ko-KR" sz="1400" dirty="0">
+                <a:solidFill>
+                  <a:schemeClr val="tx1"/>
+                </a:solidFill>
+              </a:rPr>
+              <a:t>R</a:t>
+            </a:r>
+            <a:endParaRPr lang="ko-KR" altLang="en-US" dirty="0">
+              <a:solidFill>
+                <a:schemeClr val="tx1"/>
+              </a:solidFill>
+            </a:endParaRPr>
+          </a:p>
+        </p:txBody>
+      </p:sp>
+      <p:sp>
+        <p:nvSpPr>
+          <p:cNvPr id="78" name="타원 77">
+            <a:extLst>
+              <a:ext uri="{FF2B5EF4-FFF2-40B4-BE49-F238E27FC236}">
+                <a16:creationId xmlns:a16="http://schemas.microsoft.com/office/drawing/2014/main" id="{493409C0-CDF6-6923-E0B9-5CB543E6A222}"/>
+              </a:ext>
+            </a:extLst>
+          </p:cNvPr>
+          <p:cNvSpPr/>
+          <p:nvPr/>
+        </p:nvSpPr>
+        <p:spPr>
+          <a:xfrm>
+            <a:off x="17812227" y="600661"/>
+            <a:ext cx="341938" cy="353801"/>
+          </a:xfrm>
+          <a:prstGeom prst="ellipse">
+            <a:avLst/>
+          </a:prstGeom>
+          <a:solidFill>
+            <a:srgbClr val="FFFF00"/>
+          </a:solidFill>
+        </p:spPr>
+        <p:style>
+          <a:lnRef idx="2">
+            <a:schemeClr val="accent1">
+              <a:shade val="15000"/>
+            </a:schemeClr>
+          </a:lnRef>
+          <a:fillRef idx="1">
+            <a:schemeClr val="accent1"/>
+          </a:fillRef>
+          <a:effectRef idx="0">
+            <a:schemeClr val="accent1"/>
+          </a:effectRef>
+          <a:fontRef idx="minor">
+            <a:schemeClr val="lt1"/>
+          </a:fontRef>
+        </p:style>
+        <p:txBody>
+          <a:bodyPr rtlCol="0" anchor="ctr"/>
+          <a:lstStyle/>
+          <a:p>
+            <a:pPr algn="ctr"/>
+            <a:r>
+              <a:rPr lang="en-US" altLang="ko-KR" sz="1400" dirty="0">
+                <a:solidFill>
+                  <a:schemeClr val="tx1"/>
+                </a:solidFill>
+              </a:rPr>
+              <a:t>T</a:t>
+            </a:r>
+            <a:endParaRPr lang="ko-KR" altLang="en-US" dirty="0">
+              <a:solidFill>
+                <a:schemeClr val="tx1"/>
+              </a:solidFill>
+            </a:endParaRPr>
+          </a:p>
+        </p:txBody>
+      </p:sp>
+      <p:sp>
+        <p:nvSpPr>
+          <p:cNvPr id="79" name="타원 78">
+            <a:extLst>
+              <a:ext uri="{FF2B5EF4-FFF2-40B4-BE49-F238E27FC236}">
+                <a16:creationId xmlns:a16="http://schemas.microsoft.com/office/drawing/2014/main" id="{CC53E544-8B86-E33F-7E4D-1B8A5F4A094C}"/>
+              </a:ext>
+            </a:extLst>
+          </p:cNvPr>
+          <p:cNvSpPr/>
+          <p:nvPr/>
+        </p:nvSpPr>
+        <p:spPr>
+          <a:xfrm>
+            <a:off x="17641254" y="2391220"/>
+            <a:ext cx="341938" cy="353801"/>
+          </a:xfrm>
+          <a:prstGeom prst="ellipse">
+            <a:avLst/>
+          </a:prstGeom>
+          <a:solidFill>
+            <a:srgbClr val="FFFF00"/>
+          </a:solidFill>
+        </p:spPr>
+        <p:style>
+          <a:lnRef idx="2">
+            <a:schemeClr val="accent1">
+              <a:shade val="15000"/>
+            </a:schemeClr>
+          </a:lnRef>
+          <a:fillRef idx="1">
+            <a:schemeClr val="accent1"/>
+          </a:fillRef>
+          <a:effectRef idx="0">
+            <a:schemeClr val="accent1"/>
+          </a:effectRef>
+          <a:fontRef idx="minor">
+            <a:schemeClr val="lt1"/>
+          </a:fontRef>
+        </p:style>
+        <p:txBody>
+          <a:bodyPr rtlCol="0" anchor="ctr"/>
+          <a:lstStyle/>
+          <a:p>
+            <a:pPr algn="ctr"/>
+            <a:r>
+              <a:rPr lang="en-US" altLang="ko-KR" sz="1400" dirty="0">
+                <a:solidFill>
+                  <a:schemeClr val="tx1"/>
+                </a:solidFill>
+              </a:rPr>
+              <a:t>S</a:t>
+            </a:r>
+            <a:endParaRPr lang="ko-KR" altLang="en-US" dirty="0">
+              <a:solidFill>
+                <a:schemeClr val="tx1"/>
+              </a:solidFill>
+            </a:endParaRPr>
+          </a:p>
+        </p:txBody>
+      </p:sp>
+      <p:sp>
+        <p:nvSpPr>
+          <p:cNvPr id="80" name="타원 79">
+            <a:extLst>
+              <a:ext uri="{FF2B5EF4-FFF2-40B4-BE49-F238E27FC236}">
+                <a16:creationId xmlns:a16="http://schemas.microsoft.com/office/drawing/2014/main" id="{F1454D0E-A874-36EA-E079-1843770BE1C3}"/>
+              </a:ext>
+            </a:extLst>
+          </p:cNvPr>
+          <p:cNvSpPr/>
+          <p:nvPr/>
+        </p:nvSpPr>
+        <p:spPr>
+          <a:xfrm>
+            <a:off x="18822090" y="742842"/>
+            <a:ext cx="341938" cy="353801"/>
+          </a:xfrm>
+          <a:prstGeom prst="ellipse">
+            <a:avLst/>
+          </a:prstGeom>
+          <a:solidFill>
+            <a:srgbClr val="FFFF00"/>
+          </a:solidFill>
+        </p:spPr>
+        <p:style>
+          <a:lnRef idx="2">
+            <a:schemeClr val="accent1">
+              <a:shade val="15000"/>
+            </a:schemeClr>
+          </a:lnRef>
+          <a:fillRef idx="1">
+            <a:schemeClr val="accent1"/>
+          </a:fillRef>
+          <a:effectRef idx="0">
+            <a:schemeClr val="accent1"/>
+          </a:effectRef>
+          <a:fontRef idx="minor">
+            <a:schemeClr val="lt1"/>
+          </a:fontRef>
+        </p:style>
+        <p:txBody>
+          <a:bodyPr rtlCol="0" anchor="ctr"/>
+          <a:lstStyle/>
+          <a:p>
+            <a:pPr algn="ctr"/>
+            <a:r>
+              <a:rPr lang="en-US" altLang="ko-KR" sz="1400" dirty="0">
+                <a:solidFill>
+                  <a:schemeClr val="tx1"/>
+                </a:solidFill>
+              </a:rPr>
+              <a:t>U</a:t>
+            </a:r>
+            <a:endParaRPr lang="ko-KR" altLang="en-US" dirty="0">
+              <a:solidFill>
+                <a:schemeClr val="tx1"/>
+              </a:solidFill>
+            </a:endParaRPr>
+          </a:p>
+        </p:txBody>
+      </p:sp>
+      <p:sp>
+        <p:nvSpPr>
+          <p:cNvPr id="94" name="타원 93">
+            <a:extLst>
+              <a:ext uri="{FF2B5EF4-FFF2-40B4-BE49-F238E27FC236}">
+                <a16:creationId xmlns:a16="http://schemas.microsoft.com/office/drawing/2014/main" id="{F595FB72-691F-A30F-F487-E5CD205AD84B}"/>
+              </a:ext>
+            </a:extLst>
+          </p:cNvPr>
+          <p:cNvSpPr/>
+          <p:nvPr/>
+        </p:nvSpPr>
+        <p:spPr>
+          <a:xfrm>
+            <a:off x="18639909" y="-19973"/>
+            <a:ext cx="341938" cy="353801"/>
+          </a:xfrm>
+          <a:prstGeom prst="ellipse">
+            <a:avLst/>
+          </a:prstGeom>
+          <a:solidFill>
+            <a:srgbClr val="FFC000"/>
+          </a:solidFill>
+        </p:spPr>
+        <p:style>
+          <a:lnRef idx="2">
+            <a:schemeClr val="accent1">
+              <a:shade val="15000"/>
+            </a:schemeClr>
+          </a:lnRef>
+          <a:fillRef idx="1">
+            <a:schemeClr val="accent1"/>
+          </a:fillRef>
+          <a:effectRef idx="0">
+            <a:schemeClr val="accent1"/>
+          </a:effectRef>
+          <a:fontRef idx="minor">
+            <a:schemeClr val="lt1"/>
+          </a:fontRef>
+        </p:style>
+        <p:txBody>
+          <a:bodyPr rtlCol="0" anchor="ctr"/>
+          <a:lstStyle/>
+          <a:p>
+            <a:pPr algn="ctr"/>
+            <a:r>
+              <a:rPr lang="en-US" altLang="ko-KR" sz="1400" dirty="0">
+                <a:solidFill>
+                  <a:schemeClr val="tx1"/>
+                </a:solidFill>
+              </a:rPr>
+              <a:t>V</a:t>
+            </a:r>
+            <a:endParaRPr lang="ko-KR" altLang="en-US" dirty="0">
+              <a:solidFill>
+                <a:schemeClr val="tx1"/>
+              </a:solidFill>
+            </a:endParaRPr>
+          </a:p>
+        </p:txBody>
+      </p:sp>
+      <p:sp>
+        <p:nvSpPr>
+          <p:cNvPr id="95" name="타원 94">
+            <a:extLst>
+              <a:ext uri="{FF2B5EF4-FFF2-40B4-BE49-F238E27FC236}">
+                <a16:creationId xmlns:a16="http://schemas.microsoft.com/office/drawing/2014/main" id="{C9D745A0-6681-9C96-3C52-24C7FF1E2277}"/>
+              </a:ext>
+            </a:extLst>
+          </p:cNvPr>
+          <p:cNvSpPr/>
+          <p:nvPr/>
+        </p:nvSpPr>
+        <p:spPr>
+          <a:xfrm>
+            <a:off x="20260420" y="-1353445"/>
+            <a:ext cx="341938" cy="353801"/>
+          </a:xfrm>
+          <a:prstGeom prst="ellipse">
+            <a:avLst/>
+          </a:prstGeom>
+          <a:solidFill>
+            <a:srgbClr val="FFFF00"/>
+          </a:solidFill>
+        </p:spPr>
+        <p:style>
+          <a:lnRef idx="2">
+            <a:schemeClr val="accent1">
+              <a:shade val="15000"/>
+            </a:schemeClr>
+          </a:lnRef>
+          <a:fillRef idx="1">
+            <a:schemeClr val="accent1"/>
+          </a:fillRef>
+          <a:effectRef idx="0">
+            <a:schemeClr val="accent1"/>
+          </a:effectRef>
+          <a:fontRef idx="minor">
+            <a:schemeClr val="lt1"/>
+          </a:fontRef>
+        </p:style>
+        <p:txBody>
+          <a:bodyPr rtlCol="0" anchor="ctr"/>
+          <a:lstStyle/>
+          <a:p>
+            <a:pPr algn="ctr"/>
+            <a:r>
+              <a:rPr lang="en-US" altLang="ko-KR" sz="1400" dirty="0">
+                <a:solidFill>
+                  <a:schemeClr val="tx1"/>
+                </a:solidFill>
+              </a:rPr>
+              <a:t>W</a:t>
+            </a:r>
+            <a:endParaRPr lang="ko-KR" altLang="en-US" dirty="0">
+              <a:solidFill>
+                <a:schemeClr val="tx1"/>
+              </a:solidFill>
+            </a:endParaRPr>
+          </a:p>
+        </p:txBody>
+      </p:sp>
+      <p:sp>
+        <p:nvSpPr>
+          <p:cNvPr id="96" name="타원 95">
+            <a:extLst>
+              <a:ext uri="{FF2B5EF4-FFF2-40B4-BE49-F238E27FC236}">
+                <a16:creationId xmlns:a16="http://schemas.microsoft.com/office/drawing/2014/main" id="{0CBB984E-E8B8-BC84-1F03-FE8BD2DDDD81}"/>
+              </a:ext>
+            </a:extLst>
+          </p:cNvPr>
+          <p:cNvSpPr/>
+          <p:nvPr/>
+        </p:nvSpPr>
+        <p:spPr>
+          <a:xfrm>
+            <a:off x="20793820" y="-933323"/>
+            <a:ext cx="341938" cy="353801"/>
+          </a:xfrm>
+          <a:prstGeom prst="ellipse">
+            <a:avLst/>
+          </a:prstGeom>
+          <a:solidFill>
+            <a:srgbClr val="FFFF00"/>
+          </a:solidFill>
+        </p:spPr>
+        <p:style>
+          <a:lnRef idx="2">
+            <a:schemeClr val="accent1">
+              <a:shade val="15000"/>
+            </a:schemeClr>
+          </a:lnRef>
+          <a:fillRef idx="1">
+            <a:schemeClr val="accent1"/>
+          </a:fillRef>
+          <a:effectRef idx="0">
+            <a:schemeClr val="accent1"/>
+          </a:effectRef>
+          <a:fontRef idx="minor">
+            <a:schemeClr val="lt1"/>
+          </a:fontRef>
+        </p:style>
+        <p:txBody>
+          <a:bodyPr rtlCol="0" anchor="ctr"/>
+          <a:lstStyle/>
+          <a:p>
+            <a:pPr algn="ctr"/>
+            <a:r>
+              <a:rPr lang="en-US" altLang="ko-KR" sz="1400" dirty="0">
+                <a:solidFill>
+                  <a:schemeClr val="tx1"/>
+                </a:solidFill>
+              </a:rPr>
+              <a:t>X</a:t>
+            </a:r>
+            <a:endParaRPr lang="ko-KR" altLang="en-US" dirty="0">
+              <a:solidFill>
+                <a:schemeClr val="tx1"/>
+              </a:solidFill>
+            </a:endParaRPr>
+          </a:p>
+        </p:txBody>
+      </p:sp>
+      <p:sp>
+        <p:nvSpPr>
+          <p:cNvPr id="97" name="타원 96">
+            <a:extLst>
+              <a:ext uri="{FF2B5EF4-FFF2-40B4-BE49-F238E27FC236}">
+                <a16:creationId xmlns:a16="http://schemas.microsoft.com/office/drawing/2014/main" id="{41CADC44-F086-CA73-1F4B-196C8C84F05C}"/>
+              </a:ext>
+            </a:extLst>
+          </p:cNvPr>
+          <p:cNvSpPr/>
+          <p:nvPr/>
+        </p:nvSpPr>
+        <p:spPr>
+          <a:xfrm>
+            <a:off x="22209582" y="293314"/>
+            <a:ext cx="341938" cy="353801"/>
+          </a:xfrm>
+          <a:prstGeom prst="ellipse">
+            <a:avLst/>
+          </a:prstGeom>
+          <a:solidFill>
+            <a:srgbClr val="FFFF00"/>
+          </a:solidFill>
+        </p:spPr>
+        <p:style>
+          <a:lnRef idx="2">
+            <a:schemeClr val="accent1">
+              <a:shade val="15000"/>
+            </a:schemeClr>
+          </a:lnRef>
+          <a:fillRef idx="1">
+            <a:schemeClr val="accent1"/>
+          </a:fillRef>
+          <a:effectRef idx="0">
+            <a:schemeClr val="accent1"/>
+          </a:effectRef>
+          <a:fontRef idx="minor">
+            <a:schemeClr val="lt1"/>
+          </a:fontRef>
+        </p:style>
+        <p:txBody>
+          <a:bodyPr rtlCol="0" anchor="ctr"/>
+          <a:lstStyle/>
+          <a:p>
+            <a:pPr algn="ctr"/>
+            <a:r>
+              <a:rPr lang="en-US" altLang="ko-KR" sz="1400" dirty="0">
+                <a:solidFill>
+                  <a:schemeClr val="tx1"/>
+                </a:solidFill>
+              </a:rPr>
+              <a:t>Y</a:t>
+            </a:r>
+            <a:endParaRPr lang="ko-KR" altLang="en-US" dirty="0">
+              <a:solidFill>
+                <a:schemeClr val="tx1"/>
+              </a:solidFill>
+            </a:endParaRPr>
+          </a:p>
+        </p:txBody>
+      </p:sp>
+      <p:sp>
+        <p:nvSpPr>
+          <p:cNvPr id="98" name="타원 97">
+            <a:extLst>
+              <a:ext uri="{FF2B5EF4-FFF2-40B4-BE49-F238E27FC236}">
+                <a16:creationId xmlns:a16="http://schemas.microsoft.com/office/drawing/2014/main" id="{4113AF6E-3AF1-1E0E-F4EB-C54F4852D44B}"/>
+              </a:ext>
+            </a:extLst>
+          </p:cNvPr>
+          <p:cNvSpPr/>
+          <p:nvPr/>
+        </p:nvSpPr>
+        <p:spPr>
+          <a:xfrm>
+            <a:off x="23760756" y="310243"/>
+            <a:ext cx="341938" cy="353801"/>
+          </a:xfrm>
+          <a:prstGeom prst="ellipse">
+            <a:avLst/>
+          </a:prstGeom>
+          <a:solidFill>
+            <a:srgbClr val="FFFF00"/>
+          </a:solidFill>
+        </p:spPr>
+        <p:style>
+          <a:lnRef idx="2">
+            <a:schemeClr val="accent1">
+              <a:shade val="15000"/>
+            </a:schemeClr>
+          </a:lnRef>
+          <a:fillRef idx="1">
+            <a:schemeClr val="accent1"/>
+          </a:fillRef>
+          <a:effectRef idx="0">
+            <a:schemeClr val="accent1"/>
+          </a:effectRef>
+          <a:fontRef idx="minor">
+            <a:schemeClr val="lt1"/>
+          </a:fontRef>
+        </p:style>
+        <p:txBody>
+          <a:bodyPr rtlCol="0" anchor="ctr"/>
+          <a:lstStyle/>
+          <a:p>
+            <a:pPr algn="ctr"/>
+            <a:r>
+              <a:rPr lang="en-US" altLang="ko-KR" sz="1400" dirty="0">
+                <a:solidFill>
+                  <a:schemeClr val="tx1"/>
+                </a:solidFill>
+              </a:rPr>
+              <a:t>Z</a:t>
+            </a:r>
+            <a:endParaRPr lang="ko-KR" altLang="en-US" dirty="0">
+              <a:solidFill>
+                <a:schemeClr val="tx1"/>
+              </a:solidFill>
+            </a:endParaRPr>
+          </a:p>
+        </p:txBody>
+      </p:sp>
+      <p:sp>
+        <p:nvSpPr>
+          <p:cNvPr id="99" name="타원 98">
+            <a:extLst>
+              <a:ext uri="{FF2B5EF4-FFF2-40B4-BE49-F238E27FC236}">
+                <a16:creationId xmlns:a16="http://schemas.microsoft.com/office/drawing/2014/main" id="{F81ADBDE-5E61-7DB9-E135-B1E01F77C1BB}"/>
+              </a:ext>
+            </a:extLst>
+          </p:cNvPr>
+          <p:cNvSpPr/>
+          <p:nvPr/>
+        </p:nvSpPr>
+        <p:spPr>
+          <a:xfrm>
+            <a:off x="26162561" y="3338366"/>
+            <a:ext cx="341938" cy="353801"/>
+          </a:xfrm>
+          <a:prstGeom prst="ellipse">
+            <a:avLst/>
+          </a:prstGeom>
+          <a:solidFill>
+            <a:srgbClr val="FFFF00"/>
+          </a:solidFill>
+        </p:spPr>
+        <p:style>
+          <a:lnRef idx="2">
+            <a:schemeClr val="accent1">
+              <a:shade val="15000"/>
+            </a:schemeClr>
+          </a:lnRef>
+          <a:fillRef idx="1">
+            <a:schemeClr val="accent1"/>
+          </a:fillRef>
+          <a:effectRef idx="0">
+            <a:schemeClr val="accent1"/>
+          </a:effectRef>
+          <a:fontRef idx="minor">
+            <a:schemeClr val="lt1"/>
+          </a:fontRef>
+        </p:style>
+        <p:txBody>
+          <a:bodyPr rtlCol="0" anchor="ctr"/>
+          <a:lstStyle/>
+          <a:p>
+            <a:pPr algn="ctr"/>
+            <a:r>
+              <a:rPr lang="en-US" altLang="ko-KR" sz="1400" dirty="0">
+                <a:solidFill>
+                  <a:schemeClr val="tx1"/>
+                </a:solidFill>
+              </a:rPr>
+              <a:t>b</a:t>
+            </a:r>
+            <a:endParaRPr lang="ko-KR" altLang="en-US" dirty="0">
+              <a:solidFill>
+                <a:schemeClr val="tx1"/>
+              </a:solidFill>
+            </a:endParaRPr>
+          </a:p>
+        </p:txBody>
+      </p:sp>
+      <p:sp>
+        <p:nvSpPr>
+          <p:cNvPr id="100" name="타원 99">
+            <a:extLst>
+              <a:ext uri="{FF2B5EF4-FFF2-40B4-BE49-F238E27FC236}">
+                <a16:creationId xmlns:a16="http://schemas.microsoft.com/office/drawing/2014/main" id="{A5C38EBA-43F3-B7B0-CF13-C1413C30F562}"/>
+              </a:ext>
+            </a:extLst>
+          </p:cNvPr>
+          <p:cNvSpPr/>
+          <p:nvPr/>
+        </p:nvSpPr>
+        <p:spPr>
+          <a:xfrm>
+            <a:off x="26128517" y="1665074"/>
+            <a:ext cx="341938" cy="353801"/>
+          </a:xfrm>
+          <a:prstGeom prst="ellipse">
+            <a:avLst/>
+          </a:prstGeom>
+          <a:solidFill>
+            <a:srgbClr val="FFFF00"/>
+          </a:solidFill>
+        </p:spPr>
+        <p:style>
+          <a:lnRef idx="2">
+            <a:schemeClr val="accent1">
+              <a:shade val="15000"/>
+            </a:schemeClr>
+          </a:lnRef>
+          <a:fillRef idx="1">
+            <a:schemeClr val="accent1"/>
+          </a:fillRef>
+          <a:effectRef idx="0">
+            <a:schemeClr val="accent1"/>
+          </a:effectRef>
+          <a:fontRef idx="minor">
+            <a:schemeClr val="lt1"/>
+          </a:fontRef>
+        </p:style>
+        <p:txBody>
+          <a:bodyPr rtlCol="0" anchor="ctr"/>
+          <a:lstStyle/>
+          <a:p>
+            <a:pPr algn="ctr"/>
+            <a:r>
+              <a:rPr lang="en-US" altLang="ko-KR" sz="1400" dirty="0">
+                <a:solidFill>
+                  <a:schemeClr val="tx1"/>
+                </a:solidFill>
+              </a:rPr>
+              <a:t>a</a:t>
+            </a:r>
+            <a:endParaRPr lang="ko-KR" altLang="en-US" dirty="0">
+              <a:solidFill>
+                <a:schemeClr val="tx1"/>
+              </a:solidFill>
+            </a:endParaRPr>
+          </a:p>
+        </p:txBody>
+      </p:sp>
+      <p:sp>
+        <p:nvSpPr>
+          <p:cNvPr id="101" name="타원 100">
+            <a:extLst>
+              <a:ext uri="{FF2B5EF4-FFF2-40B4-BE49-F238E27FC236}">
+                <a16:creationId xmlns:a16="http://schemas.microsoft.com/office/drawing/2014/main" id="{785FC89B-285E-E993-6A51-9315B4270D43}"/>
+              </a:ext>
+            </a:extLst>
+          </p:cNvPr>
+          <p:cNvSpPr/>
+          <p:nvPr/>
+        </p:nvSpPr>
+        <p:spPr>
+          <a:xfrm>
+            <a:off x="27874677" y="2686949"/>
+            <a:ext cx="341938" cy="353801"/>
+          </a:xfrm>
+          <a:prstGeom prst="ellipse">
+            <a:avLst/>
+          </a:prstGeom>
+          <a:solidFill>
+            <a:srgbClr val="FFFF00"/>
+          </a:solidFill>
+        </p:spPr>
+        <p:style>
+          <a:lnRef idx="2">
+            <a:schemeClr val="accent1">
+              <a:shade val="15000"/>
+            </a:schemeClr>
+          </a:lnRef>
+          <a:fillRef idx="1">
+            <a:schemeClr val="accent1"/>
+          </a:fillRef>
+          <a:effectRef idx="0">
+            <a:schemeClr val="accent1"/>
+          </a:effectRef>
+          <a:fontRef idx="minor">
+            <a:schemeClr val="lt1"/>
+          </a:fontRef>
+        </p:style>
+        <p:txBody>
+          <a:bodyPr rtlCol="0" anchor="ctr"/>
+          <a:lstStyle/>
+          <a:p>
+            <a:pPr algn="ctr"/>
+            <a:r>
+              <a:rPr lang="en-US" altLang="ko-KR" sz="1400" dirty="0">
+                <a:solidFill>
+                  <a:schemeClr val="tx1"/>
+                </a:solidFill>
+              </a:rPr>
+              <a:t>e</a:t>
+            </a:r>
+            <a:endParaRPr lang="ko-KR" altLang="en-US" dirty="0">
+              <a:solidFill>
+                <a:schemeClr val="tx1"/>
+              </a:solidFill>
+            </a:endParaRPr>
+          </a:p>
+        </p:txBody>
+      </p:sp>
+      <p:sp>
+        <p:nvSpPr>
+          <p:cNvPr id="102" name="타원 101">
+            <a:extLst>
+              <a:ext uri="{FF2B5EF4-FFF2-40B4-BE49-F238E27FC236}">
+                <a16:creationId xmlns:a16="http://schemas.microsoft.com/office/drawing/2014/main" id="{25B16E81-B3BF-2B2A-87F1-C69785FAE41E}"/>
+              </a:ext>
+            </a:extLst>
+          </p:cNvPr>
+          <p:cNvSpPr/>
+          <p:nvPr/>
+        </p:nvSpPr>
+        <p:spPr>
+          <a:xfrm>
+            <a:off x="25097012" y="4825846"/>
+            <a:ext cx="341938" cy="353801"/>
+          </a:xfrm>
+          <a:prstGeom prst="ellipse">
+            <a:avLst/>
+          </a:prstGeom>
+          <a:solidFill>
+            <a:srgbClr val="FFFF00"/>
+          </a:solidFill>
+        </p:spPr>
+        <p:style>
+          <a:lnRef idx="2">
+            <a:schemeClr val="accent1">
+              <a:shade val="15000"/>
+            </a:schemeClr>
+          </a:lnRef>
+          <a:fillRef idx="1">
+            <a:schemeClr val="accent1"/>
+          </a:fillRef>
+          <a:effectRef idx="0">
+            <a:schemeClr val="accent1"/>
+          </a:effectRef>
+          <a:fontRef idx="minor">
+            <a:schemeClr val="lt1"/>
+          </a:fontRef>
+        </p:style>
+        <p:txBody>
+          <a:bodyPr rtlCol="0" anchor="ctr"/>
+          <a:lstStyle/>
+          <a:p>
+            <a:pPr algn="ctr"/>
+            <a:r>
+              <a:rPr lang="en-US" altLang="ko-KR" sz="1400" dirty="0">
+                <a:solidFill>
+                  <a:schemeClr val="tx1"/>
+                </a:solidFill>
+              </a:rPr>
+              <a:t>d</a:t>
+            </a:r>
+            <a:endParaRPr lang="ko-KR" altLang="en-US" dirty="0">
+              <a:solidFill>
+                <a:schemeClr val="tx1"/>
+              </a:solidFill>
+            </a:endParaRPr>
+          </a:p>
+        </p:txBody>
+      </p:sp>
+      <p:sp>
+        <p:nvSpPr>
+          <p:cNvPr id="103" name="타원 102">
+            <a:extLst>
+              <a:ext uri="{FF2B5EF4-FFF2-40B4-BE49-F238E27FC236}">
+                <a16:creationId xmlns:a16="http://schemas.microsoft.com/office/drawing/2014/main" id="{17A9C2B4-79BF-E664-3489-354CC056E16D}"/>
+              </a:ext>
+            </a:extLst>
+          </p:cNvPr>
+          <p:cNvSpPr/>
+          <p:nvPr/>
+        </p:nvSpPr>
+        <p:spPr>
+          <a:xfrm>
+            <a:off x="25775612" y="4277541"/>
+            <a:ext cx="341938" cy="353801"/>
+          </a:xfrm>
+          <a:prstGeom prst="ellipse">
+            <a:avLst/>
+          </a:prstGeom>
+          <a:solidFill>
+            <a:srgbClr val="FFFF00"/>
+          </a:solidFill>
+        </p:spPr>
+        <p:style>
+          <a:lnRef idx="2">
+            <a:schemeClr val="accent1">
+              <a:shade val="15000"/>
+            </a:schemeClr>
+          </a:lnRef>
+          <a:fillRef idx="1">
+            <a:schemeClr val="accent1"/>
+          </a:fillRef>
+          <a:effectRef idx="0">
+            <a:schemeClr val="accent1"/>
+          </a:effectRef>
+          <a:fontRef idx="minor">
+            <a:schemeClr val="lt1"/>
+          </a:fontRef>
+        </p:style>
+        <p:txBody>
+          <a:bodyPr rtlCol="0" anchor="ctr"/>
+          <a:lstStyle/>
+          <a:p>
+            <a:pPr algn="ctr"/>
+            <a:r>
+              <a:rPr lang="en-US" altLang="ko-KR" sz="1400" dirty="0">
+                <a:solidFill>
+                  <a:schemeClr val="tx1"/>
+                </a:solidFill>
+              </a:rPr>
+              <a:t>c</a:t>
+            </a:r>
+            <a:endParaRPr lang="ko-KR" altLang="en-US" dirty="0">
+              <a:solidFill>
+                <a:schemeClr val="tx1"/>
+              </a:solidFill>
+            </a:endParaRPr>
+          </a:p>
+        </p:txBody>
+      </p:sp>
+      <p:sp>
+        <p:nvSpPr>
+          <p:cNvPr id="104" name="타원 103">
+            <a:extLst>
+              <a:ext uri="{FF2B5EF4-FFF2-40B4-BE49-F238E27FC236}">
+                <a16:creationId xmlns:a16="http://schemas.microsoft.com/office/drawing/2014/main" id="{CB698168-BC22-F3F3-716D-2E94A8D541F7}"/>
+              </a:ext>
+            </a:extLst>
+          </p:cNvPr>
+          <p:cNvSpPr/>
+          <p:nvPr/>
+        </p:nvSpPr>
+        <p:spPr>
+          <a:xfrm>
+            <a:off x="27529270" y="-1431203"/>
+            <a:ext cx="341938" cy="353801"/>
+          </a:xfrm>
+          <a:prstGeom prst="ellipse">
+            <a:avLst/>
+          </a:prstGeom>
+          <a:solidFill>
+            <a:srgbClr val="FFFF00"/>
+          </a:solidFill>
+        </p:spPr>
+        <p:style>
+          <a:lnRef idx="2">
+            <a:schemeClr val="accent1">
+              <a:shade val="15000"/>
+            </a:schemeClr>
+          </a:lnRef>
+          <a:fillRef idx="1">
+            <a:schemeClr val="accent1"/>
+          </a:fillRef>
+          <a:effectRef idx="0">
+            <a:schemeClr val="accent1"/>
+          </a:effectRef>
+          <a:fontRef idx="minor">
+            <a:schemeClr val="lt1"/>
+          </a:fontRef>
+        </p:style>
+        <p:txBody>
+          <a:bodyPr rtlCol="0" anchor="ctr"/>
+          <a:lstStyle/>
+          <a:p>
+            <a:pPr algn="ctr"/>
+            <a:r>
+              <a:rPr lang="en-US" altLang="ko-KR" sz="1400" dirty="0">
+                <a:solidFill>
+                  <a:schemeClr val="tx1"/>
+                </a:solidFill>
+              </a:rPr>
+              <a:t>f</a:t>
+            </a:r>
+            <a:endParaRPr lang="ko-KR" altLang="en-US" dirty="0">
+              <a:solidFill>
+                <a:schemeClr val="tx1"/>
+              </a:solidFill>
+            </a:endParaRPr>
+          </a:p>
+        </p:txBody>
+      </p:sp>
+      <p:sp>
+        <p:nvSpPr>
+          <p:cNvPr id="105" name="타원 104">
+            <a:extLst>
+              <a:ext uri="{FF2B5EF4-FFF2-40B4-BE49-F238E27FC236}">
+                <a16:creationId xmlns:a16="http://schemas.microsoft.com/office/drawing/2014/main" id="{83F7A49A-8048-6EEC-F2A2-5DE7AE940705}"/>
+              </a:ext>
+            </a:extLst>
+          </p:cNvPr>
+          <p:cNvSpPr/>
+          <p:nvPr/>
+        </p:nvSpPr>
+        <p:spPr>
+          <a:xfrm>
+            <a:off x="27927300" y="-1910167"/>
+            <a:ext cx="341938" cy="353801"/>
+          </a:xfrm>
+          <a:prstGeom prst="ellipse">
+            <a:avLst/>
+          </a:prstGeom>
+          <a:solidFill>
+            <a:srgbClr val="FFFF00"/>
+          </a:solidFill>
+        </p:spPr>
+        <p:style>
+          <a:lnRef idx="2">
+            <a:schemeClr val="accent1">
+              <a:shade val="15000"/>
+            </a:schemeClr>
+          </a:lnRef>
+          <a:fillRef idx="1">
+            <a:schemeClr val="accent1"/>
+          </a:fillRef>
+          <a:effectRef idx="0">
+            <a:schemeClr val="accent1"/>
+          </a:effectRef>
+          <a:fontRef idx="minor">
+            <a:schemeClr val="lt1"/>
+          </a:fontRef>
+        </p:style>
+        <p:txBody>
+          <a:bodyPr rtlCol="0" anchor="ctr"/>
+          <a:lstStyle/>
+          <a:p>
+            <a:pPr algn="ctr"/>
+            <a:r>
+              <a:rPr lang="en-US" altLang="ko-KR" sz="1400" dirty="0">
+                <a:solidFill>
+                  <a:schemeClr val="tx1"/>
+                </a:solidFill>
+              </a:rPr>
+              <a:t>g</a:t>
+            </a:r>
+            <a:endParaRPr lang="ko-KR" altLang="en-US" dirty="0">
+              <a:solidFill>
+                <a:schemeClr val="tx1"/>
+              </a:solidFill>
+            </a:endParaRPr>
+          </a:p>
+        </p:txBody>
+      </p:sp>
+      <p:sp>
+        <p:nvSpPr>
+          <p:cNvPr id="106" name="타원 105">
+            <a:extLst>
+              <a:ext uri="{FF2B5EF4-FFF2-40B4-BE49-F238E27FC236}">
+                <a16:creationId xmlns:a16="http://schemas.microsoft.com/office/drawing/2014/main" id="{A715F023-26F7-BEED-8CBF-7A28BA40C0A3}"/>
+              </a:ext>
+            </a:extLst>
+          </p:cNvPr>
+          <p:cNvSpPr/>
+          <p:nvPr/>
+        </p:nvSpPr>
+        <p:spPr>
+          <a:xfrm>
+            <a:off x="23526958" y="-5151704"/>
+            <a:ext cx="341938" cy="353801"/>
+          </a:xfrm>
+          <a:prstGeom prst="ellipse">
+            <a:avLst/>
+          </a:prstGeom>
+          <a:solidFill>
+            <a:srgbClr val="FFC000"/>
+          </a:solidFill>
+        </p:spPr>
+        <p:style>
+          <a:lnRef idx="2">
+            <a:schemeClr val="accent1">
+              <a:shade val="15000"/>
+            </a:schemeClr>
+          </a:lnRef>
+          <a:fillRef idx="1">
+            <a:schemeClr val="accent1"/>
+          </a:fillRef>
+          <a:effectRef idx="0">
+            <a:schemeClr val="accent1"/>
+          </a:effectRef>
+          <a:fontRef idx="minor">
+            <a:schemeClr val="lt1"/>
+          </a:fontRef>
+        </p:style>
+        <p:txBody>
+          <a:bodyPr rtlCol="0" anchor="ctr"/>
+          <a:lstStyle/>
+          <a:p>
+            <a:pPr algn="ctr"/>
+            <a:r>
+              <a:rPr lang="en-US" altLang="ko-KR" sz="1400" dirty="0">
+                <a:solidFill>
+                  <a:schemeClr val="tx1"/>
+                </a:solidFill>
+              </a:rPr>
+              <a:t>i</a:t>
+            </a:r>
+            <a:endParaRPr lang="ko-KR" altLang="en-US" dirty="0">
+              <a:solidFill>
+                <a:schemeClr val="tx1"/>
+              </a:solidFill>
+            </a:endParaRPr>
+          </a:p>
+        </p:txBody>
+      </p:sp>
+      <p:sp>
+        <p:nvSpPr>
+          <p:cNvPr id="107" name="직각 삼각형 106">
+            <a:extLst>
+              <a:ext uri="{FF2B5EF4-FFF2-40B4-BE49-F238E27FC236}">
+                <a16:creationId xmlns:a16="http://schemas.microsoft.com/office/drawing/2014/main" id="{2ADB3176-91F9-B186-3BDF-71D6AA030F1D}"/>
+              </a:ext>
+            </a:extLst>
+          </p:cNvPr>
+          <p:cNvSpPr/>
+          <p:nvPr/>
+        </p:nvSpPr>
+        <p:spPr>
+          <a:xfrm>
+            <a:off x="27698700" y="-6038850"/>
+            <a:ext cx="2336800" cy="2104529"/>
+          </a:xfrm>
+          <a:prstGeom prst="rtTriangle">
+            <a:avLst/>
+          </a:prstGeom>
+          <a:pattFill prst="wdUpDiag">
+            <a:fgClr>
+              <a:schemeClr val="accent2"/>
+            </a:fgClr>
+            <a:bgClr>
+              <a:schemeClr val="bg2"/>
+            </a:bgClr>
+          </a:pattFill>
+        </p:spPr>
+        <p:style>
+          <a:lnRef idx="2">
+            <a:schemeClr val="accent1">
+              <a:shade val="15000"/>
+            </a:schemeClr>
+          </a:lnRef>
+          <a:fillRef idx="1">
+            <a:schemeClr val="accent1"/>
+          </a:fillRef>
+          <a:effectRef idx="0">
+            <a:schemeClr val="accent1"/>
+          </a:effectRef>
+          <a:fontRef idx="minor">
+            <a:schemeClr val="lt1"/>
+          </a:fontRef>
+        </p:style>
+        <p:txBody>
+          <a:bodyPr rtlCol="0" anchor="ctr"/>
+          <a:lstStyle/>
+          <a:p>
+            <a:pPr algn="ctr"/>
+            <a:endParaRPr lang="ko-KR" altLang="en-US"/>
+          </a:p>
+        </p:txBody>
+      </p:sp>
+      <p:sp>
+        <p:nvSpPr>
+          <p:cNvPr id="108" name="직사각형 107">
+            <a:extLst>
+              <a:ext uri="{FF2B5EF4-FFF2-40B4-BE49-F238E27FC236}">
+                <a16:creationId xmlns:a16="http://schemas.microsoft.com/office/drawing/2014/main" id="{0047E1E3-2593-728E-54F4-78B58D4B9645}"/>
+              </a:ext>
+            </a:extLst>
+          </p:cNvPr>
+          <p:cNvSpPr/>
+          <p:nvPr/>
+        </p:nvSpPr>
+        <p:spPr>
+          <a:xfrm rot="5400000">
+            <a:off x="28466376" y="-4705394"/>
+            <a:ext cx="802113" cy="2336133"/>
+          </a:xfrm>
+          <a:prstGeom prst="rect">
+            <a:avLst/>
+          </a:prstGeom>
+          <a:pattFill prst="wdUpDiag">
+            <a:fgClr>
+              <a:schemeClr val="accent2"/>
+            </a:fgClr>
+            <a:bgClr>
+              <a:schemeClr val="bg2"/>
+            </a:bgClr>
+          </a:pattFill>
+        </p:spPr>
+        <p:style>
+          <a:lnRef idx="2">
+            <a:schemeClr val="accent1">
+              <a:shade val="15000"/>
+            </a:schemeClr>
+          </a:lnRef>
+          <a:fillRef idx="1">
+            <a:schemeClr val="accent1"/>
+          </a:fillRef>
+          <a:effectRef idx="0">
+            <a:schemeClr val="accent1"/>
+          </a:effectRef>
+          <a:fontRef idx="minor">
+            <a:schemeClr val="lt1"/>
+          </a:fontRef>
+        </p:style>
+        <p:txBody>
+          <a:bodyPr rtlCol="0" anchor="ctr"/>
+          <a:lstStyle/>
+          <a:p>
+            <a:pPr algn="ctr"/>
+            <a:endParaRPr lang="ko-KR" altLang="en-US"/>
+          </a:p>
+        </p:txBody>
+      </p:sp>
+      <p:sp>
+        <p:nvSpPr>
+          <p:cNvPr id="109" name="타원 108">
+            <a:extLst>
+              <a:ext uri="{FF2B5EF4-FFF2-40B4-BE49-F238E27FC236}">
+                <a16:creationId xmlns:a16="http://schemas.microsoft.com/office/drawing/2014/main" id="{4C6B4129-FB16-CEAF-A8DA-FAEB385BD1B7}"/>
+              </a:ext>
+            </a:extLst>
+          </p:cNvPr>
+          <p:cNvSpPr/>
+          <p:nvPr/>
+        </p:nvSpPr>
+        <p:spPr>
+          <a:xfrm>
+            <a:off x="22581086" y="-4710947"/>
+            <a:ext cx="341938" cy="353801"/>
+          </a:xfrm>
+          <a:prstGeom prst="ellipse">
+            <a:avLst/>
+          </a:prstGeom>
+          <a:solidFill>
+            <a:srgbClr val="FFFF00"/>
+          </a:solidFill>
+        </p:spPr>
+        <p:style>
+          <a:lnRef idx="2">
+            <a:schemeClr val="accent1">
+              <a:shade val="15000"/>
+            </a:schemeClr>
+          </a:lnRef>
+          <a:fillRef idx="1">
+            <a:schemeClr val="accent1"/>
+          </a:fillRef>
+          <a:effectRef idx="0">
+            <a:schemeClr val="accent1"/>
+          </a:effectRef>
+          <a:fontRef idx="minor">
+            <a:schemeClr val="lt1"/>
+          </a:fontRef>
+        </p:style>
+        <p:txBody>
+          <a:bodyPr rtlCol="0" anchor="ctr"/>
+          <a:lstStyle/>
+          <a:p>
+            <a:pPr algn="ctr"/>
+            <a:r>
+              <a:rPr lang="en-US" altLang="ko-KR" sz="1400" dirty="0">
+                <a:solidFill>
+                  <a:schemeClr val="tx1"/>
+                </a:solidFill>
+              </a:rPr>
+              <a:t>h</a:t>
+            </a:r>
+            <a:endParaRPr lang="ko-KR" altLang="en-US" dirty="0">
+              <a:solidFill>
+                <a:schemeClr val="tx1"/>
+              </a:solidFill>
+            </a:endParaRPr>
+          </a:p>
+        </p:txBody>
+      </p:sp>
+      <p:sp>
+        <p:nvSpPr>
+          <p:cNvPr id="110" name="타원 109">
+            <a:extLst>
+              <a:ext uri="{FF2B5EF4-FFF2-40B4-BE49-F238E27FC236}">
+                <a16:creationId xmlns:a16="http://schemas.microsoft.com/office/drawing/2014/main" id="{31088694-45AA-DCD2-EE2E-A64576E53942}"/>
+              </a:ext>
+            </a:extLst>
+          </p:cNvPr>
+          <p:cNvSpPr/>
+          <p:nvPr/>
+        </p:nvSpPr>
+        <p:spPr>
+          <a:xfrm>
+            <a:off x="22923024" y="-5661160"/>
+            <a:ext cx="341938" cy="353801"/>
+          </a:xfrm>
+          <a:prstGeom prst="ellipse">
+            <a:avLst/>
+          </a:prstGeom>
+          <a:solidFill>
+            <a:srgbClr val="FFFF00"/>
+          </a:solidFill>
+        </p:spPr>
+        <p:style>
+          <a:lnRef idx="2">
+            <a:schemeClr val="accent1">
+              <a:shade val="15000"/>
+            </a:schemeClr>
+          </a:lnRef>
+          <a:fillRef idx="1">
+            <a:schemeClr val="accent1"/>
+          </a:fillRef>
+          <a:effectRef idx="0">
+            <a:schemeClr val="accent1"/>
+          </a:effectRef>
+          <a:fontRef idx="minor">
+            <a:schemeClr val="lt1"/>
+          </a:fontRef>
+        </p:style>
+        <p:txBody>
+          <a:bodyPr rtlCol="0" anchor="ctr"/>
+          <a:lstStyle/>
+          <a:p>
+            <a:pPr algn="ctr"/>
+            <a:r>
+              <a:rPr lang="en-US" altLang="ko-KR" sz="1400" dirty="0">
+                <a:solidFill>
+                  <a:schemeClr val="tx1"/>
+                </a:solidFill>
+              </a:rPr>
+              <a:t>j</a:t>
+            </a:r>
+            <a:endParaRPr lang="ko-KR" altLang="en-US" dirty="0">
+              <a:solidFill>
+                <a:schemeClr val="tx1"/>
+              </a:solidFill>
+            </a:endParaRPr>
+          </a:p>
+        </p:txBody>
+      </p:sp>
+      <p:sp>
+        <p:nvSpPr>
+          <p:cNvPr id="111" name="타원 110">
+            <a:extLst>
+              <a:ext uri="{FF2B5EF4-FFF2-40B4-BE49-F238E27FC236}">
+                <a16:creationId xmlns:a16="http://schemas.microsoft.com/office/drawing/2014/main" id="{97ED7FBF-946A-4DC4-E96B-E4CC2B57DAA9}"/>
+              </a:ext>
+            </a:extLst>
+          </p:cNvPr>
+          <p:cNvSpPr/>
+          <p:nvPr/>
+        </p:nvSpPr>
+        <p:spPr>
+          <a:xfrm>
+            <a:off x="25206568" y="-4519619"/>
+            <a:ext cx="341938" cy="353801"/>
+          </a:xfrm>
+          <a:prstGeom prst="ellipse">
+            <a:avLst/>
+          </a:prstGeom>
+          <a:solidFill>
+            <a:srgbClr val="FFFF00"/>
+          </a:solidFill>
+        </p:spPr>
+        <p:style>
+          <a:lnRef idx="2">
+            <a:schemeClr val="accent1">
+              <a:shade val="15000"/>
+            </a:schemeClr>
+          </a:lnRef>
+          <a:fillRef idx="1">
+            <a:schemeClr val="accent1"/>
+          </a:fillRef>
+          <a:effectRef idx="0">
+            <a:schemeClr val="accent1"/>
+          </a:effectRef>
+          <a:fontRef idx="minor">
+            <a:schemeClr val="lt1"/>
+          </a:fontRef>
+        </p:style>
+        <p:txBody>
+          <a:bodyPr rtlCol="0" anchor="ctr"/>
+          <a:lstStyle/>
+          <a:p>
+            <a:pPr algn="ctr"/>
+            <a:r>
+              <a:rPr lang="en-US" altLang="ko-KR" sz="1400" dirty="0">
+                <a:solidFill>
+                  <a:schemeClr val="tx1"/>
+                </a:solidFill>
+              </a:rPr>
+              <a:t>l</a:t>
+            </a:r>
+            <a:endParaRPr lang="ko-KR" altLang="en-US" dirty="0">
+              <a:solidFill>
+                <a:schemeClr val="tx1"/>
+              </a:solidFill>
+            </a:endParaRPr>
+          </a:p>
+        </p:txBody>
+      </p:sp>
+      <p:sp>
+        <p:nvSpPr>
+          <p:cNvPr id="112" name="타원 111">
+            <a:extLst>
+              <a:ext uri="{FF2B5EF4-FFF2-40B4-BE49-F238E27FC236}">
+                <a16:creationId xmlns:a16="http://schemas.microsoft.com/office/drawing/2014/main" id="{6D9C1186-3D77-6B5C-D867-5AACF17EF1CF}"/>
+              </a:ext>
+            </a:extLst>
+          </p:cNvPr>
+          <p:cNvSpPr/>
+          <p:nvPr/>
+        </p:nvSpPr>
+        <p:spPr>
+          <a:xfrm>
+            <a:off x="24811319" y="-5661161"/>
+            <a:ext cx="341938" cy="353801"/>
+          </a:xfrm>
+          <a:prstGeom prst="ellipse">
+            <a:avLst/>
+          </a:prstGeom>
+          <a:solidFill>
+            <a:srgbClr val="FFFF00"/>
+          </a:solidFill>
+        </p:spPr>
+        <p:style>
+          <a:lnRef idx="2">
+            <a:schemeClr val="accent1">
+              <a:shade val="15000"/>
+            </a:schemeClr>
+          </a:lnRef>
+          <a:fillRef idx="1">
+            <a:schemeClr val="accent1"/>
+          </a:fillRef>
+          <a:effectRef idx="0">
+            <a:schemeClr val="accent1"/>
+          </a:effectRef>
+          <a:fontRef idx="minor">
+            <a:schemeClr val="lt1"/>
+          </a:fontRef>
+        </p:style>
+        <p:txBody>
+          <a:bodyPr rtlCol="0" anchor="ctr"/>
+          <a:lstStyle/>
+          <a:p>
+            <a:pPr algn="ctr"/>
+            <a:r>
+              <a:rPr lang="en-US" altLang="ko-KR" sz="1400" dirty="0">
+                <a:solidFill>
+                  <a:schemeClr val="tx1"/>
+                </a:solidFill>
+              </a:rPr>
+              <a:t>k</a:t>
+            </a:r>
+            <a:endParaRPr lang="ko-KR" altLang="en-US" dirty="0">
+              <a:solidFill>
+                <a:schemeClr val="tx1"/>
+              </a:solidFill>
+            </a:endParaRPr>
+          </a:p>
+        </p:txBody>
+      </p:sp>
+      <p:sp>
+        <p:nvSpPr>
+          <p:cNvPr id="113" name="타원 112">
+            <a:extLst>
+              <a:ext uri="{FF2B5EF4-FFF2-40B4-BE49-F238E27FC236}">
+                <a16:creationId xmlns:a16="http://schemas.microsoft.com/office/drawing/2014/main" id="{533C3456-E9E8-A813-3611-91622D40C0FD}"/>
+              </a:ext>
+            </a:extLst>
+          </p:cNvPr>
+          <p:cNvSpPr/>
+          <p:nvPr/>
+        </p:nvSpPr>
+        <p:spPr>
+          <a:xfrm>
+            <a:off x="26231799" y="-5848365"/>
+            <a:ext cx="341938" cy="353801"/>
+          </a:xfrm>
+          <a:prstGeom prst="ellipse">
+            <a:avLst/>
+          </a:prstGeom>
+          <a:solidFill>
+            <a:srgbClr val="FFFF00"/>
+          </a:solidFill>
+        </p:spPr>
+        <p:style>
+          <a:lnRef idx="2">
+            <a:schemeClr val="accent1">
+              <a:shade val="15000"/>
+            </a:schemeClr>
+          </a:lnRef>
+          <a:fillRef idx="1">
+            <a:schemeClr val="accent1"/>
+          </a:fillRef>
+          <a:effectRef idx="0">
+            <a:schemeClr val="accent1"/>
+          </a:effectRef>
+          <a:fontRef idx="minor">
+            <a:schemeClr val="lt1"/>
+          </a:fontRef>
+        </p:style>
+        <p:txBody>
+          <a:bodyPr rtlCol="0" anchor="ctr"/>
+          <a:lstStyle/>
+          <a:p>
+            <a:pPr algn="ctr"/>
+            <a:r>
+              <a:rPr lang="en-US" altLang="ko-KR" sz="1400" dirty="0">
+                <a:solidFill>
+                  <a:schemeClr val="tx1"/>
+                </a:solidFill>
+              </a:rPr>
+              <a:t>n</a:t>
+            </a:r>
+            <a:endParaRPr lang="ko-KR" altLang="en-US" dirty="0">
+              <a:solidFill>
+                <a:schemeClr val="tx1"/>
+              </a:solidFill>
+            </a:endParaRPr>
+          </a:p>
+        </p:txBody>
+      </p:sp>
+      <p:sp>
+        <p:nvSpPr>
+          <p:cNvPr id="114" name="타원 113">
+            <a:extLst>
+              <a:ext uri="{FF2B5EF4-FFF2-40B4-BE49-F238E27FC236}">
+                <a16:creationId xmlns:a16="http://schemas.microsoft.com/office/drawing/2014/main" id="{64D5FC92-23B0-DBD7-78D2-F049CC67D80E}"/>
+              </a:ext>
+            </a:extLst>
+          </p:cNvPr>
+          <p:cNvSpPr/>
+          <p:nvPr/>
+        </p:nvSpPr>
+        <p:spPr>
+          <a:xfrm>
+            <a:off x="26382463" y="-5025307"/>
+            <a:ext cx="341938" cy="353801"/>
+          </a:xfrm>
+          <a:prstGeom prst="ellipse">
+            <a:avLst/>
+          </a:prstGeom>
+          <a:solidFill>
+            <a:srgbClr val="FFFF00"/>
+          </a:solidFill>
+        </p:spPr>
+        <p:style>
+          <a:lnRef idx="2">
+            <a:schemeClr val="accent1">
+              <a:shade val="15000"/>
+            </a:schemeClr>
+          </a:lnRef>
+          <a:fillRef idx="1">
+            <a:schemeClr val="accent1"/>
+          </a:fillRef>
+          <a:effectRef idx="0">
+            <a:schemeClr val="accent1"/>
+          </a:effectRef>
+          <a:fontRef idx="minor">
+            <a:schemeClr val="lt1"/>
+          </a:fontRef>
+        </p:style>
+        <p:txBody>
+          <a:bodyPr rtlCol="0" anchor="ctr"/>
+          <a:lstStyle/>
+          <a:p>
+            <a:pPr algn="ctr"/>
+            <a:r>
+              <a:rPr lang="en-US" altLang="ko-KR" sz="1400" dirty="0">
+                <a:solidFill>
+                  <a:schemeClr val="tx1"/>
+                </a:solidFill>
+              </a:rPr>
+              <a:t>m</a:t>
+            </a:r>
+            <a:endParaRPr lang="ko-KR" altLang="en-US" dirty="0">
+              <a:solidFill>
+                <a:schemeClr val="tx1"/>
+              </a:solidFill>
+            </a:endParaRPr>
+          </a:p>
+        </p:txBody>
+      </p:sp>
+      <p:sp>
+        <p:nvSpPr>
+          <p:cNvPr id="115" name="타원 114">
+            <a:extLst>
+              <a:ext uri="{FF2B5EF4-FFF2-40B4-BE49-F238E27FC236}">
+                <a16:creationId xmlns:a16="http://schemas.microsoft.com/office/drawing/2014/main" id="{4FEF6DCE-8715-88BC-1D28-0C1110EFA6F8}"/>
+              </a:ext>
+            </a:extLst>
+          </p:cNvPr>
+          <p:cNvSpPr/>
+          <p:nvPr/>
+        </p:nvSpPr>
+        <p:spPr>
+          <a:xfrm>
+            <a:off x="21681402" y="-7132031"/>
+            <a:ext cx="341938" cy="353801"/>
+          </a:xfrm>
+          <a:prstGeom prst="ellipse">
+            <a:avLst/>
+          </a:prstGeom>
+          <a:solidFill>
+            <a:srgbClr val="FFFF00"/>
+          </a:solidFill>
+        </p:spPr>
+        <p:style>
+          <a:lnRef idx="2">
+            <a:schemeClr val="accent1">
+              <a:shade val="15000"/>
+            </a:schemeClr>
+          </a:lnRef>
+          <a:fillRef idx="1">
+            <a:schemeClr val="accent1"/>
+          </a:fillRef>
+          <a:effectRef idx="0">
+            <a:schemeClr val="accent1"/>
+          </a:effectRef>
+          <a:fontRef idx="minor">
+            <a:schemeClr val="lt1"/>
+          </a:fontRef>
+        </p:style>
+        <p:txBody>
+          <a:bodyPr rtlCol="0" anchor="ctr"/>
+          <a:lstStyle/>
+          <a:p>
+            <a:pPr algn="ctr"/>
+            <a:r>
+              <a:rPr lang="en-US" altLang="ko-KR" sz="1400" dirty="0">
+                <a:solidFill>
+                  <a:schemeClr val="tx1"/>
+                </a:solidFill>
+              </a:rPr>
+              <a:t>p</a:t>
+            </a:r>
+            <a:endParaRPr lang="ko-KR" altLang="en-US" dirty="0">
+              <a:solidFill>
+                <a:schemeClr val="tx1"/>
+              </a:solidFill>
+            </a:endParaRPr>
+          </a:p>
+        </p:txBody>
+      </p:sp>
+      <p:sp>
+        <p:nvSpPr>
+          <p:cNvPr id="116" name="타원 115">
+            <a:extLst>
+              <a:ext uri="{FF2B5EF4-FFF2-40B4-BE49-F238E27FC236}">
+                <a16:creationId xmlns:a16="http://schemas.microsoft.com/office/drawing/2014/main" id="{5BE4F336-8982-A29D-3667-4A29BA773AE0}"/>
+              </a:ext>
+            </a:extLst>
+          </p:cNvPr>
+          <p:cNvSpPr/>
+          <p:nvPr/>
+        </p:nvSpPr>
+        <p:spPr>
+          <a:xfrm>
+            <a:off x="16272556" y="-7175903"/>
+            <a:ext cx="341938" cy="353801"/>
+          </a:xfrm>
+          <a:prstGeom prst="ellipse">
+            <a:avLst/>
+          </a:prstGeom>
+          <a:solidFill>
+            <a:srgbClr val="FFFF00"/>
+          </a:solidFill>
+        </p:spPr>
+        <p:style>
+          <a:lnRef idx="2">
+            <a:schemeClr val="accent1">
+              <a:shade val="15000"/>
+            </a:schemeClr>
+          </a:lnRef>
+          <a:fillRef idx="1">
+            <a:schemeClr val="accent1"/>
+          </a:fillRef>
+          <a:effectRef idx="0">
+            <a:schemeClr val="accent1"/>
+          </a:effectRef>
+          <a:fontRef idx="minor">
+            <a:schemeClr val="lt1"/>
+          </a:fontRef>
+        </p:style>
+        <p:txBody>
+          <a:bodyPr rtlCol="0" anchor="ctr"/>
+          <a:lstStyle/>
+          <a:p>
+            <a:pPr algn="ctr"/>
+            <a:r>
+              <a:rPr lang="en-US" altLang="ko-KR" sz="1400" dirty="0">
+                <a:solidFill>
+                  <a:schemeClr val="tx1"/>
+                </a:solidFill>
+              </a:rPr>
+              <a:t>q</a:t>
+            </a:r>
+            <a:endParaRPr lang="ko-KR" altLang="en-US" dirty="0">
+              <a:solidFill>
+                <a:schemeClr val="tx1"/>
+              </a:solidFill>
+            </a:endParaRPr>
+          </a:p>
+        </p:txBody>
+      </p:sp>
+      <p:sp>
+        <p:nvSpPr>
+          <p:cNvPr id="117" name="타원 116">
+            <a:extLst>
+              <a:ext uri="{FF2B5EF4-FFF2-40B4-BE49-F238E27FC236}">
+                <a16:creationId xmlns:a16="http://schemas.microsoft.com/office/drawing/2014/main" id="{2EA873AC-96F0-FE0C-862D-420DED873D49}"/>
+              </a:ext>
+            </a:extLst>
+          </p:cNvPr>
+          <p:cNvSpPr/>
+          <p:nvPr/>
+        </p:nvSpPr>
+        <p:spPr>
+          <a:xfrm>
+            <a:off x="22581086" y="-7359356"/>
+            <a:ext cx="341938" cy="353801"/>
+          </a:xfrm>
+          <a:prstGeom prst="ellipse">
+            <a:avLst/>
+          </a:prstGeom>
+          <a:solidFill>
+            <a:srgbClr val="FFFF00"/>
+          </a:solidFill>
+        </p:spPr>
+        <p:style>
+          <a:lnRef idx="2">
+            <a:schemeClr val="accent1">
+              <a:shade val="15000"/>
+            </a:schemeClr>
+          </a:lnRef>
+          <a:fillRef idx="1">
+            <a:schemeClr val="accent1"/>
+          </a:fillRef>
+          <a:effectRef idx="0">
+            <a:schemeClr val="accent1"/>
+          </a:effectRef>
+          <a:fontRef idx="minor">
+            <a:schemeClr val="lt1"/>
+          </a:fontRef>
+        </p:style>
+        <p:txBody>
+          <a:bodyPr rtlCol="0" anchor="ctr"/>
+          <a:lstStyle/>
+          <a:p>
+            <a:pPr algn="ctr"/>
+            <a:r>
+              <a:rPr lang="en-US" altLang="ko-KR" sz="1400" dirty="0">
+                <a:solidFill>
+                  <a:schemeClr val="tx1"/>
+                </a:solidFill>
+              </a:rPr>
+              <a:t>o</a:t>
+            </a:r>
+            <a:endParaRPr lang="ko-KR" altLang="en-US" dirty="0">
+              <a:solidFill>
+                <a:schemeClr val="tx1"/>
+              </a:solidFill>
+            </a:endParaRPr>
           </a:p>
         </p:txBody>
       </p:sp>
